--- a/Презентация.pptx
+++ b/Презентация.pptx
@@ -11,19 +11,21 @@
     <p:sldId id="278" r:id="rId5"/>
     <p:sldId id="260" r:id="rId6"/>
     <p:sldId id="263" r:id="rId7"/>
-    <p:sldId id="264" r:id="rId8"/>
-    <p:sldId id="265" r:id="rId9"/>
-    <p:sldId id="273" r:id="rId10"/>
-    <p:sldId id="274" r:id="rId11"/>
-    <p:sldId id="266" r:id="rId12"/>
-    <p:sldId id="267" r:id="rId13"/>
-    <p:sldId id="268" r:id="rId14"/>
-    <p:sldId id="275" r:id="rId15"/>
-    <p:sldId id="269" r:id="rId16"/>
-    <p:sldId id="280" r:id="rId17"/>
-    <p:sldId id="281" r:id="rId18"/>
-    <p:sldId id="282" r:id="rId19"/>
-    <p:sldId id="279" r:id="rId20"/>
+    <p:sldId id="283" r:id="rId8"/>
+    <p:sldId id="284" r:id="rId9"/>
+    <p:sldId id="264" r:id="rId10"/>
+    <p:sldId id="265" r:id="rId11"/>
+    <p:sldId id="273" r:id="rId12"/>
+    <p:sldId id="274" r:id="rId13"/>
+    <p:sldId id="266" r:id="rId14"/>
+    <p:sldId id="267" r:id="rId15"/>
+    <p:sldId id="268" r:id="rId16"/>
+    <p:sldId id="275" r:id="rId17"/>
+    <p:sldId id="269" r:id="rId18"/>
+    <p:sldId id="280" r:id="rId19"/>
+    <p:sldId id="281" r:id="rId20"/>
+    <p:sldId id="282" r:id="rId21"/>
+    <p:sldId id="279" r:id="rId22"/>
   </p:sldIdLst>
   <p:sldSz cx="12192000" cy="6858000"/>
   <p:notesSz cx="6858000" cy="9144000"/>
@@ -271,7 +273,7 @@
             <a:fld id="{1160EA64-D806-43AC-9DF2-F8C432F32B4C}" type="datetimeFigureOut">
               <a:rPr lang="en-US" smtClean="0"/>
               <a:pPr/>
-              <a:t>6/14/2026</a:t>
+              <a:t>6/15/2026</a:t>
             </a:fld>
             <a:endParaRPr lang="en-US" dirty="0"/>
           </a:p>
@@ -441,7 +443,7 @@
             <a:fld id="{E9F9C37B-1D36-470B-8223-D6C91242EC14}" type="datetimeFigureOut">
               <a:rPr lang="en-US" smtClean="0"/>
               <a:pPr/>
-              <a:t>6/14/2026</a:t>
+              <a:t>6/15/2026</a:t>
             </a:fld>
             <a:endParaRPr lang="en-US" dirty="0"/>
           </a:p>
@@ -621,7 +623,7 @@
             <a:fld id="{67C6F52A-A82B-47A2-A83A-8C4C91F2D59F}" type="datetimeFigureOut">
               <a:rPr lang="en-US" smtClean="0"/>
               <a:pPr/>
-              <a:t>6/14/2026</a:t>
+              <a:t>6/15/2026</a:t>
             </a:fld>
             <a:endParaRPr lang="en-US" dirty="0"/>
           </a:p>
@@ -791,7 +793,7 @@
             <a:fld id="{F070A7B3-6521-4DCA-87E5-044747A908C1}" type="datetimeFigureOut">
               <a:rPr lang="en-US" smtClean="0"/>
               <a:pPr/>
-              <a:t>6/14/2026</a:t>
+              <a:t>6/15/2026</a:t>
             </a:fld>
             <a:endParaRPr lang="en-US" dirty="0"/>
           </a:p>
@@ -1038,7 +1040,7 @@
             <a:fld id="{1160EA64-D806-43AC-9DF2-F8C432F32B4C}" type="datetimeFigureOut">
               <a:rPr lang="en-US" smtClean="0"/>
               <a:pPr/>
-              <a:t>6/14/2026</a:t>
+              <a:t>6/15/2026</a:t>
             </a:fld>
             <a:endParaRPr lang="en-US" dirty="0"/>
           </a:p>
@@ -1269,7 +1271,7 @@
             <a:fld id="{AB134690-1557-4C89-A502-4959FE7FAD70}" type="datetimeFigureOut">
               <a:rPr lang="en-US" smtClean="0"/>
               <a:pPr/>
-              <a:t>6/14/2026</a:t>
+              <a:t>6/15/2026</a:t>
             </a:fld>
             <a:endParaRPr lang="en-US" dirty="0"/>
           </a:p>
@@ -1640,7 +1642,7 @@
             <a:fld id="{4F7D4976-E339-4826-83B7-FBD03F55ECF8}" type="datetimeFigureOut">
               <a:rPr lang="en-US" smtClean="0"/>
               <a:pPr/>
-              <a:t>6/14/2026</a:t>
+              <a:t>6/15/2026</a:t>
             </a:fld>
             <a:endParaRPr lang="en-US" dirty="0"/>
           </a:p>
@@ -1764,7 +1766,7 @@
             <a:fld id="{E1037C31-9E7A-4F99-8774-A0E530DE1A42}" type="datetimeFigureOut">
               <a:rPr lang="en-US" smtClean="0"/>
               <a:pPr/>
-              <a:t>6/14/2026</a:t>
+              <a:t>6/15/2026</a:t>
             </a:fld>
             <a:endParaRPr lang="en-US" dirty="0"/>
           </a:p>
@@ -1861,7 +1863,7 @@
             <a:fld id="{C278504F-A551-4DE0-9316-4DCD1D8CC752}" type="datetimeFigureOut">
               <a:rPr lang="en-US" smtClean="0"/>
               <a:pPr/>
-              <a:t>6/14/2026</a:t>
+              <a:t>6/15/2026</a:t>
             </a:fld>
             <a:endParaRPr lang="en-US" dirty="0"/>
           </a:p>
@@ -2138,7 +2140,7 @@
             <a:fld id="{1160EA64-D806-43AC-9DF2-F8C432F32B4C}" type="datetimeFigureOut">
               <a:rPr lang="en-US" smtClean="0"/>
               <a:pPr/>
-              <a:t>6/14/2026</a:t>
+              <a:t>6/15/2026</a:t>
             </a:fld>
             <a:endParaRPr lang="en-US" dirty="0"/>
           </a:p>
@@ -2397,7 +2399,7 @@
             <a:fld id="{1160EA64-D806-43AC-9DF2-F8C432F32B4C}" type="datetimeFigureOut">
               <a:rPr lang="en-US" smtClean="0"/>
               <a:pPr/>
-              <a:t>6/14/2026</a:t>
+              <a:t>6/15/2026</a:t>
             </a:fld>
             <a:endParaRPr lang="en-US" dirty="0"/>
           </a:p>
@@ -2610,7 +2612,7 @@
             <a:fld id="{1160EA64-D806-43AC-9DF2-F8C432F32B4C}" type="datetimeFigureOut">
               <a:rPr lang="en-US" smtClean="0"/>
               <a:pPr/>
-              <a:t>6/14/2026</a:t>
+              <a:t>6/15/2026</a:t>
             </a:fld>
             <a:endParaRPr lang="en-US" dirty="0"/>
           </a:p>
@@ -3540,20 +3542,19 @@
       </p:grpSpPr>
       <p:sp>
         <p:nvSpPr>
-          <p:cNvPr id="2" name="Заголовок 1"/>
-          <p:cNvSpPr txBox="1">
-            <a:spLocks/>
+          <p:cNvPr id="4" name="Заголовок 1"/>
+          <p:cNvSpPr>
+            <a:spLocks noGrp="1"/>
           </p:cNvSpPr>
-          <p:nvPr/>
+          <p:nvPr>
+            <p:ph type="title"/>
+          </p:nvPr>
         </p:nvSpPr>
         <p:spPr>
           <a:xfrm>
             <a:off x="0" y="450850"/>
             <a:ext cx="12192000" cy="758825"/>
           </a:xfrm>
-          <a:prstGeom prst="rect">
-            <a:avLst/>
-          </a:prstGeom>
           <a:solidFill>
             <a:srgbClr val="00B0F0"/>
           </a:solidFill>
@@ -3564,28 +3565,10 @@
           </a:ln>
         </p:spPr>
         <p:txBody>
-          <a:bodyPr anchor="ctr">
+          <a:bodyPr>
             <a:normAutofit/>
           </a:bodyPr>
-          <a:lstStyle>
-            <a:lvl1pPr algn="l" defTabSz="914400" rtl="0" eaLnBrk="1" latinLnBrk="0" hangingPunct="1">
-              <a:lnSpc>
-                <a:spcPct val="90000"/>
-              </a:lnSpc>
-              <a:spcBef>
-                <a:spcPct val="0"/>
-              </a:spcBef>
-              <a:buNone/>
-              <a:defRPr sz="4400" kern="1200">
-                <a:solidFill>
-                  <a:schemeClr val="tx1"/>
-                </a:solidFill>
-                <a:latin typeface="+mj-lt"/>
-                <a:ea typeface="+mj-ea"/>
-                <a:cs typeface="+mj-cs"/>
-              </a:defRPr>
-            </a:lvl1pPr>
-          </a:lstStyle>
+          <a:lstStyle/>
           <a:p>
             <a:pPr algn="ctr"/>
             <a:r>
@@ -3605,7 +3588,7 @@
           <p:cNvPr id="5" name="Рисунок 4">
             <a:extLst>
               <a:ext uri="{FF2B5EF4-FFF2-40B4-BE49-F238E27FC236}">
-                <a16:creationId xmlns:a16="http://schemas.microsoft.com/office/drawing/2014/main" id="{3DD1E4B1-5CFF-4A5B-B54F-4E2686334CF2}"/>
+                <a16:creationId xmlns:a16="http://schemas.microsoft.com/office/drawing/2014/main" id="{80CFC79D-18B0-4DBD-92EB-C8BD01296CFB}"/>
               </a:ext>
             </a:extLst>
           </p:cNvPr>
@@ -3622,8 +3605,8 @@
         </p:blipFill>
         <p:spPr>
           <a:xfrm>
-            <a:off x="102458" y="1297577"/>
-            <a:ext cx="4392684" cy="2751909"/>
+            <a:off x="205832" y="1336765"/>
+            <a:ext cx="3755434" cy="4053841"/>
           </a:xfrm>
           <a:prstGeom prst="rect">
             <a:avLst/>
@@ -3632,10 +3615,10 @@
       </p:pic>
       <p:pic>
         <p:nvPicPr>
-          <p:cNvPr id="7" name="Рисунок 6">
+          <p:cNvPr id="8" name="Рисунок 7">
             <a:extLst>
               <a:ext uri="{FF2B5EF4-FFF2-40B4-BE49-F238E27FC236}">
-                <a16:creationId xmlns:a16="http://schemas.microsoft.com/office/drawing/2014/main" id="{01377C20-FF7A-49CB-BC2A-70CA7B0C5C26}"/>
+                <a16:creationId xmlns:a16="http://schemas.microsoft.com/office/drawing/2014/main" id="{D68AC8A0-BDF6-47CC-9BCB-599A6161E6DC}"/>
               </a:ext>
             </a:extLst>
           </p:cNvPr>
@@ -3652,8 +3635,8 @@
         </p:blipFill>
         <p:spPr>
           <a:xfrm>
-            <a:off x="7696860" y="1297576"/>
-            <a:ext cx="4392684" cy="2751909"/>
+            <a:off x="8287206" y="1336765"/>
+            <a:ext cx="3698961" cy="3992881"/>
           </a:xfrm>
           <a:prstGeom prst="rect">
             <a:avLst/>
@@ -3662,10 +3645,10 @@
       </p:pic>
       <p:pic>
         <p:nvPicPr>
-          <p:cNvPr id="10" name="Рисунок 9">
+          <p:cNvPr id="12" name="Рисунок 11">
             <a:extLst>
               <a:ext uri="{FF2B5EF4-FFF2-40B4-BE49-F238E27FC236}">
-                <a16:creationId xmlns:a16="http://schemas.microsoft.com/office/drawing/2014/main" id="{5EE6D021-96B8-46D0-89F4-CEFA50F913E3}"/>
+                <a16:creationId xmlns:a16="http://schemas.microsoft.com/office/drawing/2014/main" id="{1A98C191-1BC0-4DBF-9EAB-DA904896AF4C}"/>
               </a:ext>
             </a:extLst>
           </p:cNvPr>
@@ -3682,128 +3665,8 @@
         </p:blipFill>
         <p:spPr>
           <a:xfrm>
-            <a:off x="102458" y="4137387"/>
-            <a:ext cx="4392684" cy="2629173"/>
-          </a:xfrm>
-          <a:prstGeom prst="rect">
-            <a:avLst/>
-          </a:prstGeom>
-        </p:spPr>
-      </p:pic>
-      <p:pic>
-        <p:nvPicPr>
-          <p:cNvPr id="13" name="Рисунок 12">
-            <a:extLst>
-              <a:ext uri="{FF2B5EF4-FFF2-40B4-BE49-F238E27FC236}">
-                <a16:creationId xmlns:a16="http://schemas.microsoft.com/office/drawing/2014/main" id="{4064C409-2AD4-4D3B-8ADC-E65254F7D5AC}"/>
-              </a:ext>
-            </a:extLst>
-          </p:cNvPr>
-          <p:cNvPicPr>
-            <a:picLocks noChangeAspect="1"/>
-          </p:cNvPicPr>
-          <p:nvPr/>
-        </p:nvPicPr>
-        <p:blipFill>
-          <a:blip r:embed="rId5"/>
-          <a:stretch>
-            <a:fillRect/>
-          </a:stretch>
-        </p:blipFill>
-        <p:spPr>
-          <a:xfrm>
-            <a:off x="4598126" y="1297576"/>
-            <a:ext cx="2999849" cy="1862819"/>
-          </a:xfrm>
-          <a:prstGeom prst="rect">
-            <a:avLst/>
-          </a:prstGeom>
-        </p:spPr>
-      </p:pic>
-      <p:pic>
-        <p:nvPicPr>
-          <p:cNvPr id="15" name="Рисунок 14">
-            <a:extLst>
-              <a:ext uri="{FF2B5EF4-FFF2-40B4-BE49-F238E27FC236}">
-                <a16:creationId xmlns:a16="http://schemas.microsoft.com/office/drawing/2014/main" id="{3DE2382A-57E1-4CE7-812F-B6E1871E6CED}"/>
-              </a:ext>
-            </a:extLst>
-          </p:cNvPr>
-          <p:cNvPicPr>
-            <a:picLocks noChangeAspect="1"/>
-          </p:cNvPicPr>
-          <p:nvPr/>
-        </p:nvPicPr>
-        <p:blipFill>
-          <a:blip r:embed="rId6"/>
-          <a:stretch>
-            <a:fillRect/>
-          </a:stretch>
-        </p:blipFill>
-        <p:spPr>
-          <a:xfrm>
-            <a:off x="4697011" y="4935814"/>
-            <a:ext cx="2999849" cy="1862819"/>
-          </a:xfrm>
-          <a:prstGeom prst="rect">
-            <a:avLst/>
-          </a:prstGeom>
-        </p:spPr>
-      </p:pic>
-      <p:pic>
-        <p:nvPicPr>
-          <p:cNvPr id="17" name="Рисунок 16">
-            <a:extLst>
-              <a:ext uri="{FF2B5EF4-FFF2-40B4-BE49-F238E27FC236}">
-                <a16:creationId xmlns:a16="http://schemas.microsoft.com/office/drawing/2014/main" id="{A1540F56-5314-4ADC-9ECF-931440B69D23}"/>
-              </a:ext>
-            </a:extLst>
-          </p:cNvPr>
-          <p:cNvPicPr>
-            <a:picLocks noChangeAspect="1"/>
-          </p:cNvPicPr>
-          <p:nvPr/>
-        </p:nvPicPr>
-        <p:blipFill>
-          <a:blip r:embed="rId7"/>
-          <a:stretch>
-            <a:fillRect/>
-          </a:stretch>
-        </p:blipFill>
-        <p:spPr>
-          <a:xfrm>
-            <a:off x="9089693" y="4137386"/>
-            <a:ext cx="2999849" cy="1950721"/>
-          </a:xfrm>
-          <a:prstGeom prst="rect">
-            <a:avLst/>
-          </a:prstGeom>
-        </p:spPr>
-      </p:pic>
-      <p:pic>
-        <p:nvPicPr>
-          <p:cNvPr id="19" name="Рисунок 18">
-            <a:extLst>
-              <a:ext uri="{FF2B5EF4-FFF2-40B4-BE49-F238E27FC236}">
-                <a16:creationId xmlns:a16="http://schemas.microsoft.com/office/drawing/2014/main" id="{805C2D8D-2F24-4CFE-8820-C14C0FBAB51E}"/>
-              </a:ext>
-            </a:extLst>
-          </p:cNvPr>
-          <p:cNvPicPr>
-            <a:picLocks noChangeAspect="1"/>
-          </p:cNvPicPr>
-          <p:nvPr/>
-        </p:nvPicPr>
-        <p:blipFill>
-          <a:blip r:embed="rId8"/>
-          <a:stretch>
-            <a:fillRect/>
-          </a:stretch>
-        </p:blipFill>
-        <p:spPr>
-          <a:xfrm>
-            <a:off x="4697011" y="3248296"/>
-            <a:ext cx="2651504" cy="1599617"/>
+            <a:off x="4082279" y="1336765"/>
+            <a:ext cx="4093527" cy="3261361"/>
           </a:xfrm>
           <a:prstGeom prst="rect">
             <a:avLst/>
@@ -3813,7 +3676,7 @@
     </p:spTree>
     <p:extLst>
       <p:ext uri="{BB962C8B-B14F-4D97-AF65-F5344CB8AC3E}">
-        <p14:creationId xmlns:p14="http://schemas.microsoft.com/office/powerpoint/2010/main" val="2051357608"/>
+        <p14:creationId xmlns:p14="http://schemas.microsoft.com/office/powerpoint/2010/main" val="1288615869"/>
       </p:ext>
     </p:extLst>
   </p:cSld>
@@ -3907,6 +3770,550 @@
           <p:cNvPr id="4" name="Рисунок 3">
             <a:extLst>
               <a:ext uri="{FF2B5EF4-FFF2-40B4-BE49-F238E27FC236}">
+                <a16:creationId xmlns:a16="http://schemas.microsoft.com/office/drawing/2014/main" id="{10FA64B7-6D3B-4A8C-A63B-C11BAEE7755D}"/>
+              </a:ext>
+            </a:extLst>
+          </p:cNvPr>
+          <p:cNvPicPr>
+            <a:picLocks noChangeAspect="1"/>
+          </p:cNvPicPr>
+          <p:nvPr/>
+        </p:nvPicPr>
+        <p:blipFill>
+          <a:blip r:embed="rId2"/>
+          <a:stretch>
+            <a:fillRect/>
+          </a:stretch>
+        </p:blipFill>
+        <p:spPr>
+          <a:xfrm>
+            <a:off x="175116" y="1346453"/>
+            <a:ext cx="4468339" cy="2692267"/>
+          </a:xfrm>
+          <a:prstGeom prst="rect">
+            <a:avLst/>
+          </a:prstGeom>
+        </p:spPr>
+      </p:pic>
+      <p:pic>
+        <p:nvPicPr>
+          <p:cNvPr id="8" name="Рисунок 7">
+            <a:extLst>
+              <a:ext uri="{FF2B5EF4-FFF2-40B4-BE49-F238E27FC236}">
+                <a16:creationId xmlns:a16="http://schemas.microsoft.com/office/drawing/2014/main" id="{146543F5-837B-4A20-A147-1AB254D12A6C}"/>
+              </a:ext>
+            </a:extLst>
+          </p:cNvPr>
+          <p:cNvPicPr>
+            <a:picLocks noChangeAspect="1"/>
+          </p:cNvPicPr>
+          <p:nvPr/>
+        </p:nvPicPr>
+        <p:blipFill>
+          <a:blip r:embed="rId3"/>
+          <a:stretch>
+            <a:fillRect/>
+          </a:stretch>
+        </p:blipFill>
+        <p:spPr>
+          <a:xfrm>
+            <a:off x="8684042" y="4145758"/>
+            <a:ext cx="3329885" cy="2652958"/>
+          </a:xfrm>
+          <a:prstGeom prst="rect">
+            <a:avLst/>
+          </a:prstGeom>
+        </p:spPr>
+      </p:pic>
+      <p:pic>
+        <p:nvPicPr>
+          <p:cNvPr id="11" name="Рисунок 10">
+            <a:extLst>
+              <a:ext uri="{FF2B5EF4-FFF2-40B4-BE49-F238E27FC236}">
+                <a16:creationId xmlns:a16="http://schemas.microsoft.com/office/drawing/2014/main" id="{E8A23D3A-3C4A-4E13-94A9-DB57F286392A}"/>
+              </a:ext>
+            </a:extLst>
+          </p:cNvPr>
+          <p:cNvPicPr>
+            <a:picLocks noChangeAspect="1"/>
+          </p:cNvPicPr>
+          <p:nvPr/>
+        </p:nvPicPr>
+        <p:blipFill>
+          <a:blip r:embed="rId4"/>
+          <a:stretch>
+            <a:fillRect/>
+          </a:stretch>
+        </p:blipFill>
+        <p:spPr>
+          <a:xfrm>
+            <a:off x="5992775" y="1385762"/>
+            <a:ext cx="4405593" cy="2652959"/>
+          </a:xfrm>
+          <a:prstGeom prst="rect">
+            <a:avLst/>
+          </a:prstGeom>
+        </p:spPr>
+      </p:pic>
+      <p:pic>
+        <p:nvPicPr>
+          <p:cNvPr id="13" name="Рисунок 12">
+            <a:extLst>
+              <a:ext uri="{FF2B5EF4-FFF2-40B4-BE49-F238E27FC236}">
+                <a16:creationId xmlns:a16="http://schemas.microsoft.com/office/drawing/2014/main" id="{DF3024C6-E8D2-43F8-8380-447DD7115A07}"/>
+              </a:ext>
+            </a:extLst>
+          </p:cNvPr>
+          <p:cNvPicPr>
+            <a:picLocks noChangeAspect="1"/>
+          </p:cNvPicPr>
+          <p:nvPr/>
+        </p:nvPicPr>
+        <p:blipFill>
+          <a:blip r:embed="rId5"/>
+          <a:stretch>
+            <a:fillRect/>
+          </a:stretch>
+        </p:blipFill>
+        <p:spPr>
+          <a:xfrm>
+            <a:off x="5131924" y="4145758"/>
+            <a:ext cx="3063648" cy="2652958"/>
+          </a:xfrm>
+          <a:prstGeom prst="rect">
+            <a:avLst/>
+          </a:prstGeom>
+        </p:spPr>
+      </p:pic>
+      <p:pic>
+        <p:nvPicPr>
+          <p:cNvPr id="15" name="Рисунок 14">
+            <a:extLst>
+              <a:ext uri="{FF2B5EF4-FFF2-40B4-BE49-F238E27FC236}">
+                <a16:creationId xmlns:a16="http://schemas.microsoft.com/office/drawing/2014/main" id="{44BF6698-C8A4-4B55-99A0-678B8D01EA62}"/>
+              </a:ext>
+            </a:extLst>
+          </p:cNvPr>
+          <p:cNvPicPr>
+            <a:picLocks noChangeAspect="1"/>
+          </p:cNvPicPr>
+          <p:nvPr/>
+        </p:nvPicPr>
+        <p:blipFill>
+          <a:blip r:embed="rId6"/>
+          <a:stretch>
+            <a:fillRect/>
+          </a:stretch>
+        </p:blipFill>
+        <p:spPr>
+          <a:xfrm>
+            <a:off x="178073" y="4145758"/>
+            <a:ext cx="4465381" cy="2652960"/>
+          </a:xfrm>
+          <a:prstGeom prst="rect">
+            <a:avLst/>
+          </a:prstGeom>
+        </p:spPr>
+      </p:pic>
+    </p:spTree>
+    <p:extLst>
+      <p:ext uri="{BB962C8B-B14F-4D97-AF65-F5344CB8AC3E}">
+        <p14:creationId xmlns:p14="http://schemas.microsoft.com/office/powerpoint/2010/main" val="2580977942"/>
+      </p:ext>
+    </p:extLst>
+  </p:cSld>
+  <p:clrMapOvr>
+    <a:masterClrMapping/>
+  </p:clrMapOvr>
+</p:sld>
+</file>
+
+<file path=ppt/slides/slide12.xml><?xml version="1.0" encoding="utf-8"?>
+<p:sld xmlns:a="http://schemas.openxmlformats.org/drawingml/2006/main" xmlns:r="http://schemas.openxmlformats.org/officeDocument/2006/relationships" xmlns:p="http://schemas.openxmlformats.org/presentationml/2006/main">
+  <p:cSld>
+    <p:spTree>
+      <p:nvGrpSpPr>
+        <p:cNvPr id="1" name=""/>
+        <p:cNvGrpSpPr/>
+        <p:nvPr/>
+      </p:nvGrpSpPr>
+      <p:grpSpPr>
+        <a:xfrm>
+          <a:off x="0" y="0"/>
+          <a:ext cx="0" cy="0"/>
+          <a:chOff x="0" y="0"/>
+          <a:chExt cx="0" cy="0"/>
+        </a:xfrm>
+      </p:grpSpPr>
+      <p:sp>
+        <p:nvSpPr>
+          <p:cNvPr id="2" name="Заголовок 1"/>
+          <p:cNvSpPr txBox="1">
+            <a:spLocks/>
+          </p:cNvSpPr>
+          <p:nvPr/>
+        </p:nvSpPr>
+        <p:spPr>
+          <a:xfrm>
+            <a:off x="0" y="450850"/>
+            <a:ext cx="12192000" cy="758825"/>
+          </a:xfrm>
+          <a:prstGeom prst="rect">
+            <a:avLst/>
+          </a:prstGeom>
+          <a:solidFill>
+            <a:srgbClr val="00B0F0"/>
+          </a:solidFill>
+          <a:ln>
+            <a:solidFill>
+              <a:srgbClr val="00B0F0"/>
+            </a:solidFill>
+          </a:ln>
+        </p:spPr>
+        <p:txBody>
+          <a:bodyPr anchor="ctr">
+            <a:normAutofit/>
+          </a:bodyPr>
+          <a:lstStyle>
+            <a:lvl1pPr algn="l" defTabSz="914400" rtl="0" eaLnBrk="1" latinLnBrk="0" hangingPunct="1">
+              <a:lnSpc>
+                <a:spcPct val="90000"/>
+              </a:lnSpc>
+              <a:spcBef>
+                <a:spcPct val="0"/>
+              </a:spcBef>
+              <a:buNone/>
+              <a:defRPr sz="4400" kern="1200">
+                <a:solidFill>
+                  <a:schemeClr val="tx1"/>
+                </a:solidFill>
+                <a:latin typeface="+mj-lt"/>
+                <a:ea typeface="+mj-ea"/>
+                <a:cs typeface="+mj-cs"/>
+              </a:defRPr>
+            </a:lvl1pPr>
+          </a:lstStyle>
+          <a:p>
+            <a:pPr algn="ctr"/>
+            <a:r>
+              <a:rPr lang="ru-RU" sz="4000" dirty="0">
+                <a:solidFill>
+                  <a:schemeClr val="bg1"/>
+                </a:solidFill>
+                <a:latin typeface="Corbel (Заголовки)"/>
+              </a:rPr>
+              <a:t>Программные модули</a:t>
+            </a:r>
+          </a:p>
+        </p:txBody>
+      </p:sp>
+      <p:pic>
+        <p:nvPicPr>
+          <p:cNvPr id="5" name="Рисунок 4">
+            <a:extLst>
+              <a:ext uri="{FF2B5EF4-FFF2-40B4-BE49-F238E27FC236}">
+                <a16:creationId xmlns:a16="http://schemas.microsoft.com/office/drawing/2014/main" id="{3DD1E4B1-5CFF-4A5B-B54F-4E2686334CF2}"/>
+              </a:ext>
+            </a:extLst>
+          </p:cNvPr>
+          <p:cNvPicPr>
+            <a:picLocks noChangeAspect="1"/>
+          </p:cNvPicPr>
+          <p:nvPr/>
+        </p:nvPicPr>
+        <p:blipFill>
+          <a:blip r:embed="rId2"/>
+          <a:stretch>
+            <a:fillRect/>
+          </a:stretch>
+        </p:blipFill>
+        <p:spPr>
+          <a:xfrm>
+            <a:off x="102458" y="1297577"/>
+            <a:ext cx="4392684" cy="2751909"/>
+          </a:xfrm>
+          <a:prstGeom prst="rect">
+            <a:avLst/>
+          </a:prstGeom>
+        </p:spPr>
+      </p:pic>
+      <p:pic>
+        <p:nvPicPr>
+          <p:cNvPr id="7" name="Рисунок 6">
+            <a:extLst>
+              <a:ext uri="{FF2B5EF4-FFF2-40B4-BE49-F238E27FC236}">
+                <a16:creationId xmlns:a16="http://schemas.microsoft.com/office/drawing/2014/main" id="{01377C20-FF7A-49CB-BC2A-70CA7B0C5C26}"/>
+              </a:ext>
+            </a:extLst>
+          </p:cNvPr>
+          <p:cNvPicPr>
+            <a:picLocks noChangeAspect="1"/>
+          </p:cNvPicPr>
+          <p:nvPr/>
+        </p:nvPicPr>
+        <p:blipFill>
+          <a:blip r:embed="rId3"/>
+          <a:stretch>
+            <a:fillRect/>
+          </a:stretch>
+        </p:blipFill>
+        <p:spPr>
+          <a:xfrm>
+            <a:off x="7696860" y="1297576"/>
+            <a:ext cx="4392684" cy="2751909"/>
+          </a:xfrm>
+          <a:prstGeom prst="rect">
+            <a:avLst/>
+          </a:prstGeom>
+        </p:spPr>
+      </p:pic>
+      <p:pic>
+        <p:nvPicPr>
+          <p:cNvPr id="10" name="Рисунок 9">
+            <a:extLst>
+              <a:ext uri="{FF2B5EF4-FFF2-40B4-BE49-F238E27FC236}">
+                <a16:creationId xmlns:a16="http://schemas.microsoft.com/office/drawing/2014/main" id="{5EE6D021-96B8-46D0-89F4-CEFA50F913E3}"/>
+              </a:ext>
+            </a:extLst>
+          </p:cNvPr>
+          <p:cNvPicPr>
+            <a:picLocks noChangeAspect="1"/>
+          </p:cNvPicPr>
+          <p:nvPr/>
+        </p:nvPicPr>
+        <p:blipFill>
+          <a:blip r:embed="rId4"/>
+          <a:stretch>
+            <a:fillRect/>
+          </a:stretch>
+        </p:blipFill>
+        <p:spPr>
+          <a:xfrm>
+            <a:off x="102458" y="4137387"/>
+            <a:ext cx="4392684" cy="2629173"/>
+          </a:xfrm>
+          <a:prstGeom prst="rect">
+            <a:avLst/>
+          </a:prstGeom>
+        </p:spPr>
+      </p:pic>
+      <p:pic>
+        <p:nvPicPr>
+          <p:cNvPr id="13" name="Рисунок 12">
+            <a:extLst>
+              <a:ext uri="{FF2B5EF4-FFF2-40B4-BE49-F238E27FC236}">
+                <a16:creationId xmlns:a16="http://schemas.microsoft.com/office/drawing/2014/main" id="{4064C409-2AD4-4D3B-8ADC-E65254F7D5AC}"/>
+              </a:ext>
+            </a:extLst>
+          </p:cNvPr>
+          <p:cNvPicPr>
+            <a:picLocks noChangeAspect="1"/>
+          </p:cNvPicPr>
+          <p:nvPr/>
+        </p:nvPicPr>
+        <p:blipFill>
+          <a:blip r:embed="rId5"/>
+          <a:stretch>
+            <a:fillRect/>
+          </a:stretch>
+        </p:blipFill>
+        <p:spPr>
+          <a:xfrm>
+            <a:off x="4598126" y="1297576"/>
+            <a:ext cx="2999849" cy="1862819"/>
+          </a:xfrm>
+          <a:prstGeom prst="rect">
+            <a:avLst/>
+          </a:prstGeom>
+        </p:spPr>
+      </p:pic>
+      <p:pic>
+        <p:nvPicPr>
+          <p:cNvPr id="15" name="Рисунок 14">
+            <a:extLst>
+              <a:ext uri="{FF2B5EF4-FFF2-40B4-BE49-F238E27FC236}">
+                <a16:creationId xmlns:a16="http://schemas.microsoft.com/office/drawing/2014/main" id="{3DE2382A-57E1-4CE7-812F-B6E1871E6CED}"/>
+              </a:ext>
+            </a:extLst>
+          </p:cNvPr>
+          <p:cNvPicPr>
+            <a:picLocks noChangeAspect="1"/>
+          </p:cNvPicPr>
+          <p:nvPr/>
+        </p:nvPicPr>
+        <p:blipFill>
+          <a:blip r:embed="rId6"/>
+          <a:stretch>
+            <a:fillRect/>
+          </a:stretch>
+        </p:blipFill>
+        <p:spPr>
+          <a:xfrm>
+            <a:off x="4697011" y="4935814"/>
+            <a:ext cx="2999849" cy="1862819"/>
+          </a:xfrm>
+          <a:prstGeom prst="rect">
+            <a:avLst/>
+          </a:prstGeom>
+        </p:spPr>
+      </p:pic>
+      <p:pic>
+        <p:nvPicPr>
+          <p:cNvPr id="17" name="Рисунок 16">
+            <a:extLst>
+              <a:ext uri="{FF2B5EF4-FFF2-40B4-BE49-F238E27FC236}">
+                <a16:creationId xmlns:a16="http://schemas.microsoft.com/office/drawing/2014/main" id="{A1540F56-5314-4ADC-9ECF-931440B69D23}"/>
+              </a:ext>
+            </a:extLst>
+          </p:cNvPr>
+          <p:cNvPicPr>
+            <a:picLocks noChangeAspect="1"/>
+          </p:cNvPicPr>
+          <p:nvPr/>
+        </p:nvPicPr>
+        <p:blipFill>
+          <a:blip r:embed="rId7"/>
+          <a:stretch>
+            <a:fillRect/>
+          </a:stretch>
+        </p:blipFill>
+        <p:spPr>
+          <a:xfrm>
+            <a:off x="9089693" y="4137386"/>
+            <a:ext cx="2999849" cy="1950721"/>
+          </a:xfrm>
+          <a:prstGeom prst="rect">
+            <a:avLst/>
+          </a:prstGeom>
+        </p:spPr>
+      </p:pic>
+      <p:pic>
+        <p:nvPicPr>
+          <p:cNvPr id="19" name="Рисунок 18">
+            <a:extLst>
+              <a:ext uri="{FF2B5EF4-FFF2-40B4-BE49-F238E27FC236}">
+                <a16:creationId xmlns:a16="http://schemas.microsoft.com/office/drawing/2014/main" id="{805C2D8D-2F24-4CFE-8820-C14C0FBAB51E}"/>
+              </a:ext>
+            </a:extLst>
+          </p:cNvPr>
+          <p:cNvPicPr>
+            <a:picLocks noChangeAspect="1"/>
+          </p:cNvPicPr>
+          <p:nvPr/>
+        </p:nvPicPr>
+        <p:blipFill>
+          <a:blip r:embed="rId8"/>
+          <a:stretch>
+            <a:fillRect/>
+          </a:stretch>
+        </p:blipFill>
+        <p:spPr>
+          <a:xfrm>
+            <a:off x="4697011" y="3248296"/>
+            <a:ext cx="2651504" cy="1599617"/>
+          </a:xfrm>
+          <a:prstGeom prst="rect">
+            <a:avLst/>
+          </a:prstGeom>
+        </p:spPr>
+      </p:pic>
+    </p:spTree>
+    <p:extLst>
+      <p:ext uri="{BB962C8B-B14F-4D97-AF65-F5344CB8AC3E}">
+        <p14:creationId xmlns:p14="http://schemas.microsoft.com/office/powerpoint/2010/main" val="2051357608"/>
+      </p:ext>
+    </p:extLst>
+  </p:cSld>
+  <p:clrMapOvr>
+    <a:masterClrMapping/>
+  </p:clrMapOvr>
+</p:sld>
+</file>
+
+<file path=ppt/slides/slide13.xml><?xml version="1.0" encoding="utf-8"?>
+<p:sld xmlns:a="http://schemas.openxmlformats.org/drawingml/2006/main" xmlns:r="http://schemas.openxmlformats.org/officeDocument/2006/relationships" xmlns:p="http://schemas.openxmlformats.org/presentationml/2006/main">
+  <p:cSld>
+    <p:spTree>
+      <p:nvGrpSpPr>
+        <p:cNvPr id="1" name=""/>
+        <p:cNvGrpSpPr/>
+        <p:nvPr/>
+      </p:nvGrpSpPr>
+      <p:grpSpPr>
+        <a:xfrm>
+          <a:off x="0" y="0"/>
+          <a:ext cx="0" cy="0"/>
+          <a:chOff x="0" y="0"/>
+          <a:chExt cx="0" cy="0"/>
+        </a:xfrm>
+      </p:grpSpPr>
+      <p:sp>
+        <p:nvSpPr>
+          <p:cNvPr id="2" name="Заголовок 1"/>
+          <p:cNvSpPr txBox="1">
+            <a:spLocks/>
+          </p:cNvSpPr>
+          <p:nvPr/>
+        </p:nvSpPr>
+        <p:spPr>
+          <a:xfrm>
+            <a:off x="0" y="450850"/>
+            <a:ext cx="12192000" cy="758825"/>
+          </a:xfrm>
+          <a:prstGeom prst="rect">
+            <a:avLst/>
+          </a:prstGeom>
+          <a:solidFill>
+            <a:srgbClr val="00B0F0"/>
+          </a:solidFill>
+          <a:ln>
+            <a:solidFill>
+              <a:srgbClr val="00B0F0"/>
+            </a:solidFill>
+          </a:ln>
+        </p:spPr>
+        <p:txBody>
+          <a:bodyPr anchor="ctr">
+            <a:normAutofit/>
+          </a:bodyPr>
+          <a:lstStyle>
+            <a:lvl1pPr algn="l" defTabSz="914400" rtl="0" eaLnBrk="1" latinLnBrk="0" hangingPunct="1">
+              <a:lnSpc>
+                <a:spcPct val="90000"/>
+              </a:lnSpc>
+              <a:spcBef>
+                <a:spcPct val="0"/>
+              </a:spcBef>
+              <a:buNone/>
+              <a:defRPr sz="4400" kern="1200">
+                <a:solidFill>
+                  <a:schemeClr val="tx1"/>
+                </a:solidFill>
+                <a:latin typeface="+mj-lt"/>
+                <a:ea typeface="+mj-ea"/>
+                <a:cs typeface="+mj-cs"/>
+              </a:defRPr>
+            </a:lvl1pPr>
+          </a:lstStyle>
+          <a:p>
+            <a:pPr algn="ctr"/>
+            <a:r>
+              <a:rPr lang="ru-RU" sz="4000" dirty="0">
+                <a:solidFill>
+                  <a:schemeClr val="bg1"/>
+                </a:solidFill>
+                <a:latin typeface="Corbel (Заголовки)"/>
+              </a:rPr>
+              <a:t>Программные модули</a:t>
+            </a:r>
+          </a:p>
+        </p:txBody>
+      </p:sp>
+      <p:pic>
+        <p:nvPicPr>
+          <p:cNvPr id="4" name="Рисунок 3">
+            <a:extLst>
+              <a:ext uri="{FF2B5EF4-FFF2-40B4-BE49-F238E27FC236}">
                 <a16:creationId xmlns:a16="http://schemas.microsoft.com/office/drawing/2014/main" id="{D108DAF5-6AED-4605-AB20-F365F2F1681F}"/>
               </a:ext>
             </a:extLst>
@@ -4005,7 +4412,7 @@
 </p:sld>
 </file>
 
-<file path=ppt/slides/slide12.xml><?xml version="1.0" encoding="utf-8"?>
+<file path=ppt/slides/slide14.xml><?xml version="1.0" encoding="utf-8"?>
 <p:sld xmlns:a="http://schemas.openxmlformats.org/drawingml/2006/main" xmlns:r="http://schemas.openxmlformats.org/officeDocument/2006/relationships" xmlns:p="http://schemas.openxmlformats.org/presentationml/2006/main">
   <p:cSld>
     <p:spTree>
@@ -4217,7 +4624,7 @@
 </p:sld>
 </file>
 
-<file path=ppt/slides/slide13.xml><?xml version="1.0" encoding="utf-8"?>
+<file path=ppt/slides/slide15.xml><?xml version="1.0" encoding="utf-8"?>
 <p:sld xmlns:a="http://schemas.openxmlformats.org/drawingml/2006/main" xmlns:r="http://schemas.openxmlformats.org/officeDocument/2006/relationships" xmlns:p="http://schemas.openxmlformats.org/presentationml/2006/main">
   <p:cSld>
     <p:spTree>
@@ -4390,796 +4797,6 @@
     <p:extLst>
       <p:ext uri="{BB962C8B-B14F-4D97-AF65-F5344CB8AC3E}">
         <p14:creationId xmlns:p14="http://schemas.microsoft.com/office/powerpoint/2010/main" val="607326402"/>
-      </p:ext>
-    </p:extLst>
-  </p:cSld>
-  <p:clrMapOvr>
-    <a:masterClrMapping/>
-  </p:clrMapOvr>
-</p:sld>
-</file>
-
-<file path=ppt/slides/slide14.xml><?xml version="1.0" encoding="utf-8"?>
-<p:sld xmlns:a="http://schemas.openxmlformats.org/drawingml/2006/main" xmlns:r="http://schemas.openxmlformats.org/officeDocument/2006/relationships" xmlns:p="http://schemas.openxmlformats.org/presentationml/2006/main">
-  <p:cSld>
-    <p:spTree>
-      <p:nvGrpSpPr>
-        <p:cNvPr id="1" name=""/>
-        <p:cNvGrpSpPr/>
-        <p:nvPr/>
-      </p:nvGrpSpPr>
-      <p:grpSpPr>
-        <a:xfrm>
-          <a:off x="0" y="0"/>
-          <a:ext cx="0" cy="0"/>
-          <a:chOff x="0" y="0"/>
-          <a:chExt cx="0" cy="0"/>
-        </a:xfrm>
-      </p:grpSpPr>
-      <p:sp>
-        <p:nvSpPr>
-          <p:cNvPr id="2" name="Заголовок 1"/>
-          <p:cNvSpPr txBox="1">
-            <a:spLocks/>
-          </p:cNvSpPr>
-          <p:nvPr/>
-        </p:nvSpPr>
-        <p:spPr>
-          <a:xfrm>
-            <a:off x="0" y="450850"/>
-            <a:ext cx="12192000" cy="758825"/>
-          </a:xfrm>
-          <a:prstGeom prst="rect">
-            <a:avLst/>
-          </a:prstGeom>
-          <a:solidFill>
-            <a:srgbClr val="00B0F0"/>
-          </a:solidFill>
-          <a:ln>
-            <a:solidFill>
-              <a:srgbClr val="00B0F0"/>
-            </a:solidFill>
-          </a:ln>
-        </p:spPr>
-        <p:txBody>
-          <a:bodyPr anchor="ctr">
-            <a:normAutofit/>
-          </a:bodyPr>
-          <a:lstStyle>
-            <a:lvl1pPr algn="l" defTabSz="914400" rtl="0" eaLnBrk="1" latinLnBrk="0" hangingPunct="1">
-              <a:lnSpc>
-                <a:spcPct val="90000"/>
-              </a:lnSpc>
-              <a:spcBef>
-                <a:spcPct val="0"/>
-              </a:spcBef>
-              <a:buNone/>
-              <a:defRPr sz="4400" kern="1200">
-                <a:solidFill>
-                  <a:schemeClr val="tx1"/>
-                </a:solidFill>
-                <a:latin typeface="+mj-lt"/>
-                <a:ea typeface="+mj-ea"/>
-                <a:cs typeface="+mj-cs"/>
-              </a:defRPr>
-            </a:lvl1pPr>
-          </a:lstStyle>
-          <a:p>
-            <a:pPr algn="ctr"/>
-            <a:r>
-              <a:rPr lang="ru-RU" sz="4000" dirty="0">
-                <a:solidFill>
-                  <a:schemeClr val="bg1"/>
-                </a:solidFill>
-                <a:latin typeface="Corbel (Заголовки)"/>
-              </a:rPr>
-              <a:t>Программные модули</a:t>
-            </a:r>
-          </a:p>
-        </p:txBody>
-      </p:sp>
-      <p:pic>
-        <p:nvPicPr>
-          <p:cNvPr id="4" name="Рисунок 3">
-            <a:extLst>
-              <a:ext uri="{FF2B5EF4-FFF2-40B4-BE49-F238E27FC236}">
-                <a16:creationId xmlns:a16="http://schemas.microsoft.com/office/drawing/2014/main" id="{D2BB8B52-012E-47CE-B1C1-BD210B29C54E}"/>
-              </a:ext>
-            </a:extLst>
-          </p:cNvPr>
-          <p:cNvPicPr>
-            <a:picLocks noChangeAspect="1"/>
-          </p:cNvPicPr>
-          <p:nvPr/>
-        </p:nvPicPr>
-        <p:blipFill>
-          <a:blip r:embed="rId2"/>
-          <a:stretch>
-            <a:fillRect/>
-          </a:stretch>
-        </p:blipFill>
-        <p:spPr>
-          <a:xfrm>
-            <a:off x="3440588" y="1383526"/>
-            <a:ext cx="5999580" cy="2427372"/>
-          </a:xfrm>
-          <a:prstGeom prst="rect">
-            <a:avLst/>
-          </a:prstGeom>
-        </p:spPr>
-      </p:pic>
-      <p:pic>
-        <p:nvPicPr>
-          <p:cNvPr id="8" name="Рисунок 7">
-            <a:extLst>
-              <a:ext uri="{FF2B5EF4-FFF2-40B4-BE49-F238E27FC236}">
-                <a16:creationId xmlns:a16="http://schemas.microsoft.com/office/drawing/2014/main" id="{46D71341-F9C2-431A-B46E-1FC2C660B5C8}"/>
-              </a:ext>
-            </a:extLst>
-          </p:cNvPr>
-          <p:cNvPicPr>
-            <a:picLocks noChangeAspect="1"/>
-          </p:cNvPicPr>
-          <p:nvPr/>
-        </p:nvPicPr>
-        <p:blipFill>
-          <a:blip r:embed="rId3"/>
-          <a:stretch>
-            <a:fillRect/>
-          </a:stretch>
-        </p:blipFill>
-        <p:spPr>
-          <a:xfrm>
-            <a:off x="3440588" y="3810898"/>
-            <a:ext cx="4876647" cy="2985102"/>
-          </a:xfrm>
-          <a:prstGeom prst="rect">
-            <a:avLst/>
-          </a:prstGeom>
-        </p:spPr>
-      </p:pic>
-      <p:pic>
-        <p:nvPicPr>
-          <p:cNvPr id="10" name="Рисунок 9">
-            <a:extLst>
-              <a:ext uri="{FF2B5EF4-FFF2-40B4-BE49-F238E27FC236}">
-                <a16:creationId xmlns:a16="http://schemas.microsoft.com/office/drawing/2014/main" id="{0AA446A8-66FE-49AC-9D81-C6BA8E151A7F}"/>
-              </a:ext>
-            </a:extLst>
-          </p:cNvPr>
-          <p:cNvPicPr>
-            <a:picLocks noChangeAspect="1"/>
-          </p:cNvPicPr>
-          <p:nvPr/>
-        </p:nvPicPr>
-        <p:blipFill>
-          <a:blip r:embed="rId4"/>
-          <a:stretch>
-            <a:fillRect/>
-          </a:stretch>
-        </p:blipFill>
-        <p:spPr>
-          <a:xfrm>
-            <a:off x="177038" y="1367246"/>
-            <a:ext cx="2897241" cy="5445034"/>
-          </a:xfrm>
-          <a:prstGeom prst="rect">
-            <a:avLst/>
-          </a:prstGeom>
-        </p:spPr>
-      </p:pic>
-    </p:spTree>
-    <p:extLst>
-      <p:ext uri="{BB962C8B-B14F-4D97-AF65-F5344CB8AC3E}">
-        <p14:creationId xmlns:p14="http://schemas.microsoft.com/office/powerpoint/2010/main" val="2051357608"/>
-      </p:ext>
-    </p:extLst>
-  </p:cSld>
-  <p:clrMapOvr>
-    <a:masterClrMapping/>
-  </p:clrMapOvr>
-</p:sld>
-</file>
-
-<file path=ppt/slides/slide15.xml><?xml version="1.0" encoding="utf-8"?>
-<p:sld xmlns:a="http://schemas.openxmlformats.org/drawingml/2006/main" xmlns:r="http://schemas.openxmlformats.org/officeDocument/2006/relationships" xmlns:p="http://schemas.openxmlformats.org/presentationml/2006/main">
-  <p:cSld>
-    <p:spTree>
-      <p:nvGrpSpPr>
-        <p:cNvPr id="1" name=""/>
-        <p:cNvGrpSpPr/>
-        <p:nvPr/>
-      </p:nvGrpSpPr>
-      <p:grpSpPr>
-        <a:xfrm>
-          <a:off x="0" y="0"/>
-          <a:ext cx="0" cy="0"/>
-          <a:chOff x="0" y="0"/>
-          <a:chExt cx="0" cy="0"/>
-        </a:xfrm>
-      </p:grpSpPr>
-      <p:sp>
-        <p:nvSpPr>
-          <p:cNvPr id="3" name="Заголовок 1"/>
-          <p:cNvSpPr txBox="1">
-            <a:spLocks/>
-          </p:cNvSpPr>
-          <p:nvPr/>
-        </p:nvSpPr>
-        <p:spPr>
-          <a:xfrm>
-            <a:off x="0" y="450850"/>
-            <a:ext cx="12192000" cy="758825"/>
-          </a:xfrm>
-          <a:prstGeom prst="rect">
-            <a:avLst/>
-          </a:prstGeom>
-          <a:solidFill>
-            <a:srgbClr val="00B0F0"/>
-          </a:solidFill>
-          <a:ln>
-            <a:solidFill>
-              <a:srgbClr val="00B0F0"/>
-            </a:solidFill>
-          </a:ln>
-        </p:spPr>
-        <p:txBody>
-          <a:bodyPr anchor="ctr">
-            <a:normAutofit/>
-          </a:bodyPr>
-          <a:lstStyle>
-            <a:lvl1pPr algn="l" defTabSz="914400" rtl="0" eaLnBrk="1" latinLnBrk="0" hangingPunct="1">
-              <a:lnSpc>
-                <a:spcPct val="90000"/>
-              </a:lnSpc>
-              <a:spcBef>
-                <a:spcPct val="0"/>
-              </a:spcBef>
-              <a:buNone/>
-              <a:defRPr sz="4400" kern="1200">
-                <a:solidFill>
-                  <a:schemeClr val="tx1"/>
-                </a:solidFill>
-                <a:latin typeface="+mj-lt"/>
-                <a:ea typeface="+mj-ea"/>
-                <a:cs typeface="+mj-cs"/>
-              </a:defRPr>
-            </a:lvl1pPr>
-          </a:lstStyle>
-          <a:p>
-            <a:pPr algn="ctr"/>
-            <a:r>
-              <a:rPr lang="ru-RU" sz="4000" dirty="0">
-                <a:solidFill>
-                  <a:schemeClr val="bg1"/>
-                </a:solidFill>
-                <a:latin typeface="Corbel (Заголовки)"/>
-              </a:rPr>
-              <a:t>Применяемые меры защиты</a:t>
-            </a:r>
-          </a:p>
-        </p:txBody>
-      </p:sp>
-      <p:sp>
-        <p:nvSpPr>
-          <p:cNvPr id="4" name="Прямоугольник 3"/>
-          <p:cNvSpPr/>
-          <p:nvPr/>
-        </p:nvSpPr>
-        <p:spPr>
-          <a:xfrm>
-            <a:off x="4010022" y="2512843"/>
-            <a:ext cx="3333750" cy="369332"/>
-          </a:xfrm>
-          <a:prstGeom prst="rect">
-            <a:avLst/>
-          </a:prstGeom>
-        </p:spPr>
-        <p:txBody>
-          <a:bodyPr wrap="square" anchor="ctr">
-            <a:spAutoFit/>
-          </a:bodyPr>
-          <a:lstStyle/>
-          <a:p>
-            <a:pPr algn="ctr"/>
-            <a:r>
-              <a:rPr lang="ru-RU" dirty="0">
-                <a:solidFill>
-                  <a:srgbClr val="000000"/>
-                </a:solidFill>
-                <a:latin typeface="Times New Roman" panose="02020603050405020304" pitchFamily="18" charset="0"/>
-              </a:rPr>
-              <a:t>Скрытие персональных данных</a:t>
-            </a:r>
-            <a:endParaRPr lang="ru-RU" dirty="0"/>
-          </a:p>
-        </p:txBody>
-      </p:sp>
-      <p:sp>
-        <p:nvSpPr>
-          <p:cNvPr id="5" name="Прямоугольник 4"/>
-          <p:cNvSpPr/>
-          <p:nvPr/>
-        </p:nvSpPr>
-        <p:spPr>
-          <a:xfrm>
-            <a:off x="253943" y="2459570"/>
-            <a:ext cx="2979855" cy="646331"/>
-          </a:xfrm>
-          <a:prstGeom prst="rect">
-            <a:avLst/>
-          </a:prstGeom>
-        </p:spPr>
-        <p:txBody>
-          <a:bodyPr wrap="none" anchor="ctr">
-            <a:spAutoFit/>
-          </a:bodyPr>
-          <a:lstStyle/>
-          <a:p>
-            <a:pPr lvl="0" algn="ctr">
-              <a:spcAft>
-                <a:spcPts val="0"/>
-              </a:spcAft>
-              <a:tabLst>
-                <a:tab pos="450215" algn="l"/>
-                <a:tab pos="900430" algn="l"/>
-                <a:tab pos="990600" algn="l"/>
-              </a:tabLst>
-            </a:pPr>
-            <a:r>
-              <a:rPr lang="ru-RU" dirty="0">
-                <a:solidFill>
-                  <a:srgbClr val="000000"/>
-                </a:solidFill>
-                <a:latin typeface="Times New Roman" panose="02020603050405020304" pitchFamily="18" charset="0"/>
-                <a:ea typeface="Times New Roman" panose="02020603050405020304" pitchFamily="18" charset="0"/>
-              </a:rPr>
-              <a:t>Разграничение прав доступа</a:t>
-            </a:r>
-            <a:br>
-              <a:rPr lang="ru-RU" dirty="0">
-                <a:solidFill>
-                  <a:srgbClr val="000000"/>
-                </a:solidFill>
-                <a:latin typeface="Times New Roman" panose="02020603050405020304" pitchFamily="18" charset="0"/>
-                <a:ea typeface="Times New Roman" panose="02020603050405020304" pitchFamily="18" charset="0"/>
-              </a:rPr>
-            </a:br>
-            <a:r>
-              <a:rPr lang="ru-RU" dirty="0">
-                <a:solidFill>
-                  <a:srgbClr val="000000"/>
-                </a:solidFill>
-                <a:latin typeface="Times New Roman" panose="02020603050405020304" pitchFamily="18" charset="0"/>
-                <a:ea typeface="Times New Roman" panose="02020603050405020304" pitchFamily="18" charset="0"/>
-              </a:rPr>
-              <a:t>с помощью авторизации</a:t>
-            </a:r>
-            <a:endParaRPr lang="ru-RU" sz="1100" dirty="0">
-              <a:effectLst/>
-              <a:latin typeface="Times New Roman" panose="02020603050405020304" pitchFamily="18" charset="0"/>
-              <a:ea typeface="Times New Roman" panose="02020603050405020304" pitchFamily="18" charset="0"/>
-            </a:endParaRPr>
-          </a:p>
-        </p:txBody>
-      </p:sp>
-      <p:sp>
-        <p:nvSpPr>
-          <p:cNvPr id="6" name="Прямоугольник 5"/>
-          <p:cNvSpPr/>
-          <p:nvPr/>
-        </p:nvSpPr>
-        <p:spPr>
-          <a:xfrm>
-            <a:off x="8090829" y="2520925"/>
-            <a:ext cx="3847228" cy="646331"/>
-          </a:xfrm>
-          <a:prstGeom prst="rect">
-            <a:avLst/>
-          </a:prstGeom>
-        </p:spPr>
-        <p:txBody>
-          <a:bodyPr wrap="square" anchor="ctr">
-            <a:spAutoFit/>
-          </a:bodyPr>
-          <a:lstStyle/>
-          <a:p>
-            <a:pPr algn="ctr"/>
-            <a:r>
-              <a:rPr lang="ru-RU" dirty="0">
-                <a:solidFill>
-                  <a:srgbClr val="000000"/>
-                </a:solidFill>
-                <a:latin typeface="Times New Roman" panose="02020603050405020304" pitchFamily="18" charset="0"/>
-              </a:rPr>
-              <a:t>Авторизованный пользователь не может удалить сам себя</a:t>
-            </a:r>
-            <a:endParaRPr lang="ru-RU" dirty="0"/>
-          </a:p>
-        </p:txBody>
-      </p:sp>
-      <p:sp>
-        <p:nvSpPr>
-          <p:cNvPr id="7" name="Прямоугольник 6"/>
-          <p:cNvSpPr/>
-          <p:nvPr/>
-        </p:nvSpPr>
-        <p:spPr>
-          <a:xfrm>
-            <a:off x="3921315" y="4711125"/>
-            <a:ext cx="3511167" cy="646331"/>
-          </a:xfrm>
-          <a:prstGeom prst="rect">
-            <a:avLst/>
-          </a:prstGeom>
-        </p:spPr>
-        <p:txBody>
-          <a:bodyPr wrap="square">
-            <a:spAutoFit/>
-          </a:bodyPr>
-          <a:lstStyle/>
-          <a:p>
-            <a:pPr lvl="0" algn="ctr">
-              <a:spcAft>
-                <a:spcPts val="0"/>
-              </a:spcAft>
-              <a:tabLst>
-                <a:tab pos="450215" algn="l"/>
-                <a:tab pos="900430" algn="l"/>
-                <a:tab pos="990600" algn="l"/>
-              </a:tabLst>
-            </a:pPr>
-            <a:r>
-              <a:rPr lang="ru-RU" dirty="0">
-                <a:solidFill>
-                  <a:srgbClr val="000000"/>
-                </a:solidFill>
-                <a:latin typeface="Times New Roman" panose="02020603050405020304" pitchFamily="18" charset="0"/>
-                <a:ea typeface="Times New Roman" panose="02020603050405020304" pitchFamily="18" charset="0"/>
-              </a:rPr>
-              <a:t>Удаление записи у которых есть связи невозможно</a:t>
-            </a:r>
-            <a:endParaRPr lang="ru-RU" sz="1100" dirty="0">
-              <a:effectLst/>
-              <a:latin typeface="Times New Roman" panose="02020603050405020304" pitchFamily="18" charset="0"/>
-              <a:ea typeface="Times New Roman" panose="02020603050405020304" pitchFamily="18" charset="0"/>
-            </a:endParaRPr>
-          </a:p>
-        </p:txBody>
-      </p:sp>
-      <p:sp>
-        <p:nvSpPr>
-          <p:cNvPr id="8" name="Прямоугольник 7"/>
-          <p:cNvSpPr/>
-          <p:nvPr/>
-        </p:nvSpPr>
-        <p:spPr>
-          <a:xfrm>
-            <a:off x="4054981" y="3668708"/>
-            <a:ext cx="3243837" cy="369332"/>
-          </a:xfrm>
-          <a:prstGeom prst="rect">
-            <a:avLst/>
-          </a:prstGeom>
-        </p:spPr>
-        <p:txBody>
-          <a:bodyPr wrap="none">
-            <a:spAutoFit/>
-          </a:bodyPr>
-          <a:lstStyle/>
-          <a:p>
-            <a:pPr algn="ctr"/>
-            <a:r>
-              <a:rPr lang="ru-RU" dirty="0">
-                <a:solidFill>
-                  <a:srgbClr val="000000"/>
-                </a:solidFill>
-                <a:latin typeface="Times New Roman" panose="02020603050405020304" pitchFamily="18" charset="0"/>
-                <a:ea typeface="Times New Roman" panose="02020603050405020304" pitchFamily="18" charset="0"/>
-              </a:rPr>
-              <a:t>Скрытие пароля при его вводе </a:t>
-            </a:r>
-            <a:endParaRPr lang="ru-RU" dirty="0"/>
-          </a:p>
-        </p:txBody>
-      </p:sp>
-      <p:sp>
-        <p:nvSpPr>
-          <p:cNvPr id="9" name="Прямоугольник 8"/>
-          <p:cNvSpPr/>
-          <p:nvPr/>
-        </p:nvSpPr>
-        <p:spPr>
-          <a:xfrm>
-            <a:off x="8444277" y="4678076"/>
-            <a:ext cx="3140329" cy="646331"/>
-          </a:xfrm>
-          <a:prstGeom prst="rect">
-            <a:avLst/>
-          </a:prstGeom>
-        </p:spPr>
-        <p:txBody>
-          <a:bodyPr wrap="square" anchor="ctr">
-            <a:spAutoFit/>
-          </a:bodyPr>
-          <a:lstStyle/>
-          <a:p>
-            <a:pPr algn="ctr"/>
-            <a:r>
-              <a:rPr lang="ru-RU" dirty="0">
-                <a:latin typeface="Times New Roman" panose="02020603050405020304" pitchFamily="18" charset="0"/>
-                <a:ea typeface="Times New Roman" panose="02020603050405020304" pitchFamily="18" charset="0"/>
-              </a:rPr>
-              <a:t>Удаление записей только после</a:t>
-            </a:r>
-            <a:r>
-              <a:rPr lang="en-US" dirty="0">
-                <a:latin typeface="Times New Roman" panose="02020603050405020304" pitchFamily="18" charset="0"/>
-                <a:ea typeface="Times New Roman" panose="02020603050405020304" pitchFamily="18" charset="0"/>
-              </a:rPr>
-              <a:t> </a:t>
-            </a:r>
-            <a:r>
-              <a:rPr lang="ru-RU" dirty="0">
-                <a:latin typeface="Times New Roman" panose="02020603050405020304" pitchFamily="18" charset="0"/>
-                <a:ea typeface="Times New Roman" panose="02020603050405020304" pitchFamily="18" charset="0"/>
-              </a:rPr>
-              <a:t>подтверждения </a:t>
-            </a:r>
-            <a:endParaRPr lang="ru-RU" dirty="0"/>
-          </a:p>
-        </p:txBody>
-      </p:sp>
-      <p:pic>
-        <p:nvPicPr>
-          <p:cNvPr id="24" name="Рисунок 23">
-            <a:extLst>
-              <a:ext uri="{FF2B5EF4-FFF2-40B4-BE49-F238E27FC236}">
-                <a16:creationId xmlns:a16="http://schemas.microsoft.com/office/drawing/2014/main" id="{26D9F968-EB95-47B4-BC75-CC7B8E58711B}"/>
-              </a:ext>
-            </a:extLst>
-          </p:cNvPr>
-          <p:cNvPicPr>
-            <a:picLocks noChangeAspect="1"/>
-          </p:cNvPicPr>
-          <p:nvPr/>
-        </p:nvPicPr>
-        <p:blipFill>
-          <a:blip r:embed="rId2"/>
-          <a:stretch>
-            <a:fillRect/>
-          </a:stretch>
-        </p:blipFill>
-        <p:spPr>
-          <a:xfrm>
-            <a:off x="8330305" y="3148891"/>
-            <a:ext cx="3368275" cy="1418221"/>
-          </a:xfrm>
-          <a:prstGeom prst="rect">
-            <a:avLst/>
-          </a:prstGeom>
-        </p:spPr>
-      </p:pic>
-      <p:pic>
-        <p:nvPicPr>
-          <p:cNvPr id="26" name="Рисунок 25">
-            <a:extLst>
-              <a:ext uri="{FF2B5EF4-FFF2-40B4-BE49-F238E27FC236}">
-                <a16:creationId xmlns:a16="http://schemas.microsoft.com/office/drawing/2014/main" id="{4B4FBE4D-8293-4609-9C22-993EF7725BE6}"/>
-              </a:ext>
-            </a:extLst>
-          </p:cNvPr>
-          <p:cNvPicPr>
-            <a:picLocks noChangeAspect="1"/>
-          </p:cNvPicPr>
-          <p:nvPr/>
-        </p:nvPicPr>
-        <p:blipFill>
-          <a:blip r:embed="rId3"/>
-          <a:stretch>
-            <a:fillRect/>
-          </a:stretch>
-        </p:blipFill>
-        <p:spPr>
-          <a:xfrm>
-            <a:off x="3988146" y="5324407"/>
-            <a:ext cx="3377503" cy="1376355"/>
-          </a:xfrm>
-          <a:prstGeom prst="rect">
-            <a:avLst/>
-          </a:prstGeom>
-        </p:spPr>
-      </p:pic>
-      <p:sp>
-        <p:nvSpPr>
-          <p:cNvPr id="15" name="Прямоугольник 14">
-            <a:extLst>
-              <a:ext uri="{FF2B5EF4-FFF2-40B4-BE49-F238E27FC236}">
-                <a16:creationId xmlns:a16="http://schemas.microsoft.com/office/drawing/2014/main" id="{60DEC7E2-3935-48CF-9554-B164967DDAA9}"/>
-              </a:ext>
-            </a:extLst>
-          </p:cNvPr>
-          <p:cNvSpPr/>
-          <p:nvPr/>
-        </p:nvSpPr>
-        <p:spPr>
-          <a:xfrm>
-            <a:off x="156753" y="1283864"/>
-            <a:ext cx="11731353" cy="1175706"/>
-          </a:xfrm>
-          <a:prstGeom prst="rect">
-            <a:avLst/>
-          </a:prstGeom>
-        </p:spPr>
-        <p:txBody>
-          <a:bodyPr wrap="square">
-            <a:spAutoFit/>
-          </a:bodyPr>
-          <a:lstStyle/>
-          <a:p>
-            <a:pPr indent="540000" algn="just">
-              <a:lnSpc>
-                <a:spcPct val="120000"/>
-              </a:lnSpc>
-            </a:pPr>
-            <a:r>
-              <a:rPr lang="ru-RU" sz="2000" dirty="0">
-                <a:effectLst/>
-              </a:rPr>
-              <a:t>Защита данных </a:t>
-            </a:r>
-            <a:r>
-              <a:rPr lang="en-US" sz="2000" dirty="0">
-                <a:effectLst/>
-              </a:rPr>
-              <a:t>– </a:t>
-            </a:r>
-            <a:r>
-              <a:rPr lang="ru-RU" sz="2000" dirty="0">
-                <a:effectLst/>
-              </a:rPr>
-              <a:t>это предотвращение несанкционированного доступа, изменения или удаления информации, а также защита данных при сбоях программных и аппаратных средств.</a:t>
-            </a:r>
-          </a:p>
-          <a:p>
-            <a:pPr indent="540000" algn="just">
-              <a:lnSpc>
-                <a:spcPct val="120000"/>
-              </a:lnSpc>
-            </a:pPr>
-            <a:r>
-              <a:rPr lang="ru-RU" sz="2000" dirty="0">
-                <a:effectLst/>
-              </a:rPr>
-              <a:t>В разработанной АИС применяются следующие меры защиты информации:</a:t>
-            </a:r>
-          </a:p>
-        </p:txBody>
-      </p:sp>
-      <p:pic>
-        <p:nvPicPr>
-          <p:cNvPr id="10" name="Рисунок 9">
-            <a:extLst>
-              <a:ext uri="{FF2B5EF4-FFF2-40B4-BE49-F238E27FC236}">
-                <a16:creationId xmlns:a16="http://schemas.microsoft.com/office/drawing/2014/main" id="{5BB08106-93E1-4F2E-9243-143F9593C532}"/>
-              </a:ext>
-            </a:extLst>
-          </p:cNvPr>
-          <p:cNvPicPr>
-            <a:picLocks noChangeAspect="1"/>
-          </p:cNvPicPr>
-          <p:nvPr/>
-        </p:nvPicPr>
-        <p:blipFill>
-          <a:blip r:embed="rId4"/>
-          <a:stretch>
-            <a:fillRect/>
-          </a:stretch>
-        </p:blipFill>
-        <p:spPr>
-          <a:xfrm>
-            <a:off x="126114" y="3118790"/>
-            <a:ext cx="3235511" cy="2325633"/>
-          </a:xfrm>
-          <a:prstGeom prst="rect">
-            <a:avLst/>
-          </a:prstGeom>
-        </p:spPr>
-      </p:pic>
-      <p:pic>
-        <p:nvPicPr>
-          <p:cNvPr id="12" name="Рисунок 11">
-            <a:extLst>
-              <a:ext uri="{FF2B5EF4-FFF2-40B4-BE49-F238E27FC236}">
-                <a16:creationId xmlns:a16="http://schemas.microsoft.com/office/drawing/2014/main" id="{320124AA-6DE5-4AA9-9A9A-015724B11A40}"/>
-              </a:ext>
-            </a:extLst>
-          </p:cNvPr>
-          <p:cNvPicPr>
-            <a:picLocks noChangeAspect="1"/>
-          </p:cNvPicPr>
-          <p:nvPr/>
-        </p:nvPicPr>
-        <p:blipFill>
-          <a:blip r:embed="rId5"/>
-          <a:stretch>
-            <a:fillRect/>
-          </a:stretch>
-        </p:blipFill>
-        <p:spPr>
-          <a:xfrm>
-            <a:off x="3526971" y="2904153"/>
-            <a:ext cx="4604040" cy="686031"/>
-          </a:xfrm>
-          <a:prstGeom prst="rect">
-            <a:avLst/>
-          </a:prstGeom>
-        </p:spPr>
-      </p:pic>
-      <p:pic>
-        <p:nvPicPr>
-          <p:cNvPr id="17" name="Рисунок 16">
-            <a:extLst>
-              <a:ext uri="{FF2B5EF4-FFF2-40B4-BE49-F238E27FC236}">
-                <a16:creationId xmlns:a16="http://schemas.microsoft.com/office/drawing/2014/main" id="{6BADC123-67EF-48DF-AFE2-8B31D01302DC}"/>
-              </a:ext>
-            </a:extLst>
-          </p:cNvPr>
-          <p:cNvPicPr>
-            <a:picLocks noChangeAspect="1"/>
-          </p:cNvPicPr>
-          <p:nvPr/>
-        </p:nvPicPr>
-        <p:blipFill>
-          <a:blip r:embed="rId6"/>
-          <a:stretch>
-            <a:fillRect/>
-          </a:stretch>
-        </p:blipFill>
-        <p:spPr>
-          <a:xfrm>
-            <a:off x="4141752" y="4058865"/>
-            <a:ext cx="3334215" cy="619211"/>
-          </a:xfrm>
-          <a:prstGeom prst="rect">
-            <a:avLst/>
-          </a:prstGeom>
-        </p:spPr>
-      </p:pic>
-      <p:pic>
-        <p:nvPicPr>
-          <p:cNvPr id="20" name="Рисунок 19">
-            <a:extLst>
-              <a:ext uri="{FF2B5EF4-FFF2-40B4-BE49-F238E27FC236}">
-                <a16:creationId xmlns:a16="http://schemas.microsoft.com/office/drawing/2014/main" id="{29DB95E1-CF40-4BE9-BC72-C0060C78F078}"/>
-              </a:ext>
-            </a:extLst>
-          </p:cNvPr>
-          <p:cNvPicPr>
-            <a:picLocks noChangeAspect="1"/>
-          </p:cNvPicPr>
-          <p:nvPr/>
-        </p:nvPicPr>
-        <p:blipFill>
-          <a:blip r:embed="rId7"/>
-          <a:stretch>
-            <a:fillRect/>
-          </a:stretch>
-        </p:blipFill>
-        <p:spPr>
-          <a:xfrm>
-            <a:off x="8323517" y="5324407"/>
-            <a:ext cx="3381847" cy="1448002"/>
-          </a:xfrm>
-          <a:prstGeom prst="rect">
-            <a:avLst/>
-          </a:prstGeom>
-        </p:spPr>
-      </p:pic>
-    </p:spTree>
-    <p:extLst>
-      <p:ext uri="{BB962C8B-B14F-4D97-AF65-F5344CB8AC3E}">
-        <p14:creationId xmlns:p14="http://schemas.microsoft.com/office/powerpoint/2010/main" val="2838169731"/>
       </p:ext>
     </p:extLst>
   </p:cSld>
@@ -5208,7 +4825,7 @@
       </p:grpSpPr>
       <p:sp>
         <p:nvSpPr>
-          <p:cNvPr id="3" name="Заголовок 1"/>
+          <p:cNvPr id="2" name="Заголовок 1"/>
           <p:cNvSpPr txBox="1">
             <a:spLocks/>
           </p:cNvSpPr>
@@ -5263,207 +4880,17 @@
                 </a:solidFill>
                 <a:latin typeface="Corbel (Заголовки)"/>
               </a:rPr>
-              <a:t>Применяемые меры защиты</a:t>
-            </a:r>
-          </a:p>
-        </p:txBody>
-      </p:sp>
-      <p:sp>
-        <p:nvSpPr>
-          <p:cNvPr id="4" name="Прямоугольник 3"/>
-          <p:cNvSpPr/>
-          <p:nvPr/>
-        </p:nvSpPr>
-        <p:spPr>
-          <a:xfrm>
-            <a:off x="3198354" y="1296288"/>
-            <a:ext cx="3333750" cy="369332"/>
-          </a:xfrm>
-          <a:prstGeom prst="rect">
-            <a:avLst/>
-          </a:prstGeom>
-        </p:spPr>
-        <p:txBody>
-          <a:bodyPr wrap="square" anchor="ctr">
-            <a:spAutoFit/>
-          </a:bodyPr>
-          <a:lstStyle/>
-          <a:p>
-            <a:pPr algn="ctr"/>
-            <a:r>
-              <a:rPr lang="ru-RU" dirty="0">
-                <a:solidFill>
-                  <a:srgbClr val="000000"/>
-                </a:solidFill>
-                <a:latin typeface="Times New Roman" panose="02020603050405020304" pitchFamily="18" charset="0"/>
-              </a:rPr>
-              <a:t>Парольная защита базы данных</a:t>
-            </a:r>
-            <a:endParaRPr lang="ru-RU" dirty="0"/>
-          </a:p>
-        </p:txBody>
-      </p:sp>
-      <p:sp>
-        <p:nvSpPr>
-          <p:cNvPr id="5" name="Прямоугольник 4"/>
-          <p:cNvSpPr/>
-          <p:nvPr/>
-        </p:nvSpPr>
-        <p:spPr>
-          <a:xfrm>
-            <a:off x="1114853" y="1209675"/>
-            <a:ext cx="1261884" cy="458074"/>
-          </a:xfrm>
-          <a:prstGeom prst="rect">
-            <a:avLst/>
-          </a:prstGeom>
-        </p:spPr>
-        <p:txBody>
-          <a:bodyPr wrap="none" anchor="ctr">
-            <a:spAutoFit/>
-          </a:bodyPr>
-          <a:lstStyle/>
-          <a:p>
-            <a:pPr lvl="0" algn="ctr">
-              <a:lnSpc>
-                <a:spcPct val="150000"/>
-              </a:lnSpc>
-              <a:spcAft>
-                <a:spcPts val="0"/>
-              </a:spcAft>
-              <a:tabLst>
-                <a:tab pos="450215" algn="l"/>
-                <a:tab pos="900430" algn="l"/>
-                <a:tab pos="990600" algn="l"/>
-              </a:tabLst>
-            </a:pPr>
-            <a:r>
-              <a:rPr lang="en-US" dirty="0">
-                <a:solidFill>
-                  <a:srgbClr val="000000"/>
-                </a:solidFill>
-                <a:latin typeface="Times New Roman" panose="02020603050405020304" pitchFamily="18" charset="0"/>
-                <a:ea typeface="Times New Roman" panose="02020603050405020304" pitchFamily="18" charset="0"/>
-              </a:rPr>
-              <a:t>CAPTCHA</a:t>
-            </a:r>
-            <a:endParaRPr lang="ru-RU" sz="1100" dirty="0">
-              <a:effectLst/>
-              <a:latin typeface="Times New Roman" panose="02020603050405020304" pitchFamily="18" charset="0"/>
-              <a:ea typeface="Times New Roman" panose="02020603050405020304" pitchFamily="18" charset="0"/>
-            </a:endParaRPr>
-          </a:p>
-        </p:txBody>
-      </p:sp>
-      <p:sp>
-        <p:nvSpPr>
-          <p:cNvPr id="6" name="Прямоугольник 5"/>
-          <p:cNvSpPr/>
-          <p:nvPr/>
-        </p:nvSpPr>
-        <p:spPr>
-          <a:xfrm>
-            <a:off x="-56250" y="3862964"/>
-            <a:ext cx="3847228" cy="646331"/>
-          </a:xfrm>
-          <a:prstGeom prst="rect">
-            <a:avLst/>
-          </a:prstGeom>
-        </p:spPr>
-        <p:txBody>
-          <a:bodyPr wrap="square" anchor="ctr">
-            <a:spAutoFit/>
-          </a:bodyPr>
-          <a:lstStyle/>
-          <a:p>
-            <a:pPr algn="ctr"/>
-            <a:r>
-              <a:rPr lang="ru-RU" dirty="0">
-                <a:solidFill>
-                  <a:srgbClr val="000000"/>
-                </a:solidFill>
-                <a:latin typeface="Times New Roman" panose="02020603050405020304" pitchFamily="18" charset="0"/>
-              </a:rPr>
-              <a:t>Резервное копирование и восстановление базы данных</a:t>
-            </a:r>
-            <a:endParaRPr lang="ru-RU" dirty="0"/>
-          </a:p>
-        </p:txBody>
-      </p:sp>
-      <p:sp>
-        <p:nvSpPr>
-          <p:cNvPr id="8" name="Прямоугольник 7"/>
-          <p:cNvSpPr/>
-          <p:nvPr/>
-        </p:nvSpPr>
-        <p:spPr>
-          <a:xfrm>
-            <a:off x="6629677" y="4232366"/>
-            <a:ext cx="4017254" cy="369332"/>
-          </a:xfrm>
-          <a:prstGeom prst="rect">
-            <a:avLst/>
-          </a:prstGeom>
-        </p:spPr>
-        <p:txBody>
-          <a:bodyPr wrap="none">
-            <a:spAutoFit/>
-          </a:bodyPr>
-          <a:lstStyle/>
-          <a:p>
-            <a:pPr algn="ctr"/>
-            <a:r>
-              <a:rPr lang="ru-RU" dirty="0">
-                <a:solidFill>
-                  <a:srgbClr val="000000"/>
-                </a:solidFill>
-                <a:latin typeface="Times New Roman" panose="02020603050405020304" pitchFamily="18" charset="0"/>
-                <a:ea typeface="Times New Roman" panose="02020603050405020304" pitchFamily="18" charset="0"/>
-              </a:rPr>
-              <a:t>Подтверждение выхода из приложения</a:t>
-            </a:r>
-            <a:endParaRPr lang="ru-RU" dirty="0"/>
-          </a:p>
-        </p:txBody>
-      </p:sp>
-      <p:sp>
-        <p:nvSpPr>
-          <p:cNvPr id="9" name="Прямоугольник 8"/>
-          <p:cNvSpPr/>
-          <p:nvPr/>
-        </p:nvSpPr>
-        <p:spPr>
-          <a:xfrm>
-            <a:off x="6822288" y="1296288"/>
-            <a:ext cx="3433383" cy="369332"/>
-          </a:xfrm>
-          <a:prstGeom prst="rect">
-            <a:avLst/>
-          </a:prstGeom>
-        </p:spPr>
-        <p:txBody>
-          <a:bodyPr wrap="square" anchor="ctr">
-            <a:spAutoFit/>
-          </a:bodyPr>
-          <a:lstStyle/>
-          <a:p>
-            <a:pPr algn="ctr"/>
-            <a:r>
-              <a:rPr lang="ru-RU" dirty="0">
-                <a:latin typeface="Times New Roman" panose="02020603050405020304" pitchFamily="18" charset="0"/>
-              </a:rPr>
-              <a:t>Контроль вводимой информации</a:t>
-            </a:r>
-            <a:endParaRPr lang="ru-RU" dirty="0"/>
+              <a:t>Программные модули</a:t>
+            </a:r>
           </a:p>
         </p:txBody>
       </p:sp>
       <p:pic>
         <p:nvPicPr>
-          <p:cNvPr id="11" name="Рисунок 10">
+          <p:cNvPr id="4" name="Рисунок 3">
             <a:extLst>
               <a:ext uri="{FF2B5EF4-FFF2-40B4-BE49-F238E27FC236}">
-                <a16:creationId xmlns:a16="http://schemas.microsoft.com/office/drawing/2014/main" id="{ED30AA15-F178-4671-8FE1-F880C73296E6}"/>
+                <a16:creationId xmlns:a16="http://schemas.microsoft.com/office/drawing/2014/main" id="{D2BB8B52-012E-47CE-B1C1-BD210B29C54E}"/>
               </a:ext>
             </a:extLst>
           </p:cNvPr>
@@ -5480,8 +4907,8 @@
         </p:blipFill>
         <p:spPr>
           <a:xfrm>
-            <a:off x="302499" y="1665620"/>
-            <a:ext cx="2886592" cy="2179883"/>
+            <a:off x="3440588" y="1383526"/>
+            <a:ext cx="5999580" cy="2427372"/>
           </a:xfrm>
           <a:prstGeom prst="rect">
             <a:avLst/>
@@ -5490,10 +4917,10 @@
       </p:pic>
       <p:pic>
         <p:nvPicPr>
-          <p:cNvPr id="14" name="Рисунок 13">
+          <p:cNvPr id="8" name="Рисунок 7">
             <a:extLst>
               <a:ext uri="{FF2B5EF4-FFF2-40B4-BE49-F238E27FC236}">
-                <a16:creationId xmlns:a16="http://schemas.microsoft.com/office/drawing/2014/main" id="{A609E437-69E5-49D6-831E-352F2AAA29AF}"/>
+                <a16:creationId xmlns:a16="http://schemas.microsoft.com/office/drawing/2014/main" id="{46D71341-F9C2-431A-B46E-1FC2C660B5C8}"/>
               </a:ext>
             </a:extLst>
           </p:cNvPr>
@@ -5510,8 +4937,8 @@
         </p:blipFill>
         <p:spPr>
           <a:xfrm>
-            <a:off x="3702171" y="1665620"/>
-            <a:ext cx="2326116" cy="3946974"/>
+            <a:off x="3440588" y="3810898"/>
+            <a:ext cx="4876647" cy="2985102"/>
           </a:xfrm>
           <a:prstGeom prst="rect">
             <a:avLst/>
@@ -5520,10 +4947,10 @@
       </p:pic>
       <p:pic>
         <p:nvPicPr>
-          <p:cNvPr id="18" name="Рисунок 17">
+          <p:cNvPr id="10" name="Рисунок 9">
             <a:extLst>
               <a:ext uri="{FF2B5EF4-FFF2-40B4-BE49-F238E27FC236}">
-                <a16:creationId xmlns:a16="http://schemas.microsoft.com/office/drawing/2014/main" id="{AD2BB2FC-0BEC-4708-B15B-191F24636E5A}"/>
+                <a16:creationId xmlns:a16="http://schemas.microsoft.com/office/drawing/2014/main" id="{0AA446A8-66FE-49AC-9D81-C6BA8E151A7F}"/>
               </a:ext>
             </a:extLst>
           </p:cNvPr>
@@ -5540,66 +4967,8 @@
         </p:blipFill>
         <p:spPr>
           <a:xfrm>
-            <a:off x="322741" y="4473972"/>
-            <a:ext cx="3089246" cy="2348705"/>
-          </a:xfrm>
-          <a:prstGeom prst="rect">
-            <a:avLst/>
-          </a:prstGeom>
-        </p:spPr>
-      </p:pic>
-      <p:pic>
-        <p:nvPicPr>
-          <p:cNvPr id="23" name="Рисунок 22">
-            <a:extLst>
-              <a:ext uri="{FF2B5EF4-FFF2-40B4-BE49-F238E27FC236}">
-                <a16:creationId xmlns:a16="http://schemas.microsoft.com/office/drawing/2014/main" id="{D4EE2ECB-77B1-42E1-8F7B-9512C96BE738}"/>
-              </a:ext>
-            </a:extLst>
-          </p:cNvPr>
-          <p:cNvPicPr/>
-          <p:nvPr/>
-        </p:nvPicPr>
-        <p:blipFill>
-          <a:blip r:embed="rId5"/>
-          <a:stretch>
-            <a:fillRect/>
-          </a:stretch>
-        </p:blipFill>
-        <p:spPr>
-          <a:xfrm>
-            <a:off x="7003992" y="1665620"/>
-            <a:ext cx="3069974" cy="2584163"/>
-          </a:xfrm>
-          <a:prstGeom prst="rect">
-            <a:avLst/>
-          </a:prstGeom>
-        </p:spPr>
-      </p:pic>
-      <p:pic>
-        <p:nvPicPr>
-          <p:cNvPr id="22" name="Рисунок 21">
-            <a:extLst>
-              <a:ext uri="{FF2B5EF4-FFF2-40B4-BE49-F238E27FC236}">
-                <a16:creationId xmlns:a16="http://schemas.microsoft.com/office/drawing/2014/main" id="{79DD2F45-61E8-425A-AD52-BD0C0CAE9EA9}"/>
-              </a:ext>
-            </a:extLst>
-          </p:cNvPr>
-          <p:cNvPicPr>
-            <a:picLocks noChangeAspect="1"/>
-          </p:cNvPicPr>
-          <p:nvPr/>
-        </p:nvPicPr>
-        <p:blipFill>
-          <a:blip r:embed="rId6"/>
-          <a:stretch>
-            <a:fillRect/>
-          </a:stretch>
-        </p:blipFill>
-        <p:spPr>
-          <a:xfrm>
-            <a:off x="6933091" y="4619115"/>
-            <a:ext cx="3410426" cy="1448002"/>
+            <a:off x="177038" y="1367246"/>
+            <a:ext cx="2897241" cy="5445034"/>
           </a:xfrm>
           <a:prstGeom prst="rect">
             <a:avLst/>
@@ -5609,7 +4978,7 @@
     </p:spTree>
     <p:extLst>
       <p:ext uri="{BB962C8B-B14F-4D97-AF65-F5344CB8AC3E}">
-        <p14:creationId xmlns:p14="http://schemas.microsoft.com/office/powerpoint/2010/main" val="1726839924"/>
+        <p14:creationId xmlns:p14="http://schemas.microsoft.com/office/powerpoint/2010/main" val="2051357608"/>
       </p:ext>
     </p:extLst>
   </p:cSld>
@@ -5693,35 +5062,364 @@
                 </a:solidFill>
                 <a:latin typeface="Corbel (Заголовки)"/>
               </a:rPr>
-              <a:t>Обоснование экономической эффективности</a:t>
-            </a:r>
-          </a:p>
-        </p:txBody>
-      </p:sp>
-      <p:sp>
-        <p:nvSpPr>
-          <p:cNvPr id="2" name="TextBox 1">
+              <a:t>Применяемые меры защиты</a:t>
+            </a:r>
+          </a:p>
+        </p:txBody>
+      </p:sp>
+      <p:sp>
+        <p:nvSpPr>
+          <p:cNvPr id="4" name="Прямоугольник 3"/>
+          <p:cNvSpPr/>
+          <p:nvPr/>
+        </p:nvSpPr>
+        <p:spPr>
+          <a:xfrm>
+            <a:off x="4010022" y="2512843"/>
+            <a:ext cx="3333750" cy="369332"/>
+          </a:xfrm>
+          <a:prstGeom prst="rect">
+            <a:avLst/>
+          </a:prstGeom>
+        </p:spPr>
+        <p:txBody>
+          <a:bodyPr wrap="square" anchor="ctr">
+            <a:spAutoFit/>
+          </a:bodyPr>
+          <a:lstStyle/>
+          <a:p>
+            <a:pPr algn="ctr"/>
+            <a:r>
+              <a:rPr lang="ru-RU" dirty="0">
+                <a:solidFill>
+                  <a:srgbClr val="000000"/>
+                </a:solidFill>
+                <a:latin typeface="Times New Roman" panose="02020603050405020304" pitchFamily="18" charset="0"/>
+              </a:rPr>
+              <a:t>Скрытие персональных данных</a:t>
+            </a:r>
+            <a:endParaRPr lang="ru-RU" dirty="0"/>
+          </a:p>
+        </p:txBody>
+      </p:sp>
+      <p:sp>
+        <p:nvSpPr>
+          <p:cNvPr id="5" name="Прямоугольник 4"/>
+          <p:cNvSpPr/>
+          <p:nvPr/>
+        </p:nvSpPr>
+        <p:spPr>
+          <a:xfrm>
+            <a:off x="253943" y="2459570"/>
+            <a:ext cx="2979855" cy="646331"/>
+          </a:xfrm>
+          <a:prstGeom prst="rect">
+            <a:avLst/>
+          </a:prstGeom>
+        </p:spPr>
+        <p:txBody>
+          <a:bodyPr wrap="none" anchor="ctr">
+            <a:spAutoFit/>
+          </a:bodyPr>
+          <a:lstStyle/>
+          <a:p>
+            <a:pPr lvl="0" algn="ctr">
+              <a:spcAft>
+                <a:spcPts val="0"/>
+              </a:spcAft>
+              <a:tabLst>
+                <a:tab pos="450215" algn="l"/>
+                <a:tab pos="900430" algn="l"/>
+                <a:tab pos="990600" algn="l"/>
+              </a:tabLst>
+            </a:pPr>
+            <a:r>
+              <a:rPr lang="ru-RU" dirty="0">
+                <a:solidFill>
+                  <a:srgbClr val="000000"/>
+                </a:solidFill>
+                <a:latin typeface="Times New Roman" panose="02020603050405020304" pitchFamily="18" charset="0"/>
+                <a:ea typeface="Times New Roman" panose="02020603050405020304" pitchFamily="18" charset="0"/>
+              </a:rPr>
+              <a:t>Разграничение прав доступа</a:t>
+            </a:r>
+            <a:br>
+              <a:rPr lang="ru-RU" dirty="0">
+                <a:solidFill>
+                  <a:srgbClr val="000000"/>
+                </a:solidFill>
+                <a:latin typeface="Times New Roman" panose="02020603050405020304" pitchFamily="18" charset="0"/>
+                <a:ea typeface="Times New Roman" panose="02020603050405020304" pitchFamily="18" charset="0"/>
+              </a:rPr>
+            </a:br>
+            <a:r>
+              <a:rPr lang="ru-RU" dirty="0">
+                <a:solidFill>
+                  <a:srgbClr val="000000"/>
+                </a:solidFill>
+                <a:latin typeface="Times New Roman" panose="02020603050405020304" pitchFamily="18" charset="0"/>
+                <a:ea typeface="Times New Roman" panose="02020603050405020304" pitchFamily="18" charset="0"/>
+              </a:rPr>
+              <a:t>с помощью авторизации</a:t>
+            </a:r>
+            <a:endParaRPr lang="ru-RU" sz="1100" dirty="0">
+              <a:effectLst/>
+              <a:latin typeface="Times New Roman" panose="02020603050405020304" pitchFamily="18" charset="0"/>
+              <a:ea typeface="Times New Roman" panose="02020603050405020304" pitchFamily="18" charset="0"/>
+            </a:endParaRPr>
+          </a:p>
+        </p:txBody>
+      </p:sp>
+      <p:sp>
+        <p:nvSpPr>
+          <p:cNvPr id="6" name="Прямоугольник 5"/>
+          <p:cNvSpPr/>
+          <p:nvPr/>
+        </p:nvSpPr>
+        <p:spPr>
+          <a:xfrm>
+            <a:off x="8090829" y="2520925"/>
+            <a:ext cx="3847228" cy="646331"/>
+          </a:xfrm>
+          <a:prstGeom prst="rect">
+            <a:avLst/>
+          </a:prstGeom>
+        </p:spPr>
+        <p:txBody>
+          <a:bodyPr wrap="square" anchor="ctr">
+            <a:spAutoFit/>
+          </a:bodyPr>
+          <a:lstStyle/>
+          <a:p>
+            <a:pPr algn="ctr"/>
+            <a:r>
+              <a:rPr lang="ru-RU" dirty="0">
+                <a:solidFill>
+                  <a:srgbClr val="000000"/>
+                </a:solidFill>
+                <a:latin typeface="Times New Roman" panose="02020603050405020304" pitchFamily="18" charset="0"/>
+              </a:rPr>
+              <a:t>Авторизованный пользователь не может удалить сам себя</a:t>
+            </a:r>
+            <a:endParaRPr lang="ru-RU" dirty="0"/>
+          </a:p>
+        </p:txBody>
+      </p:sp>
+      <p:sp>
+        <p:nvSpPr>
+          <p:cNvPr id="7" name="Прямоугольник 6"/>
+          <p:cNvSpPr/>
+          <p:nvPr/>
+        </p:nvSpPr>
+        <p:spPr>
+          <a:xfrm>
+            <a:off x="3921315" y="4711125"/>
+            <a:ext cx="3511167" cy="646331"/>
+          </a:xfrm>
+          <a:prstGeom prst="rect">
+            <a:avLst/>
+          </a:prstGeom>
+        </p:spPr>
+        <p:txBody>
+          <a:bodyPr wrap="square">
+            <a:spAutoFit/>
+          </a:bodyPr>
+          <a:lstStyle/>
+          <a:p>
+            <a:pPr lvl="0" algn="ctr">
+              <a:spcAft>
+                <a:spcPts val="0"/>
+              </a:spcAft>
+              <a:tabLst>
+                <a:tab pos="450215" algn="l"/>
+                <a:tab pos="900430" algn="l"/>
+                <a:tab pos="990600" algn="l"/>
+              </a:tabLst>
+            </a:pPr>
+            <a:r>
+              <a:rPr lang="ru-RU" dirty="0">
+                <a:solidFill>
+                  <a:srgbClr val="000000"/>
+                </a:solidFill>
+                <a:latin typeface="Times New Roman" panose="02020603050405020304" pitchFamily="18" charset="0"/>
+                <a:ea typeface="Times New Roman" panose="02020603050405020304" pitchFamily="18" charset="0"/>
+              </a:rPr>
+              <a:t>Удаление записи у которых есть связи невозможно</a:t>
+            </a:r>
+            <a:endParaRPr lang="ru-RU" sz="1100" dirty="0">
+              <a:effectLst/>
+              <a:latin typeface="Times New Roman" panose="02020603050405020304" pitchFamily="18" charset="0"/>
+              <a:ea typeface="Times New Roman" panose="02020603050405020304" pitchFamily="18" charset="0"/>
+            </a:endParaRPr>
+          </a:p>
+        </p:txBody>
+      </p:sp>
+      <p:sp>
+        <p:nvSpPr>
+          <p:cNvPr id="8" name="Прямоугольник 7"/>
+          <p:cNvSpPr/>
+          <p:nvPr/>
+        </p:nvSpPr>
+        <p:spPr>
+          <a:xfrm>
+            <a:off x="4054981" y="3668708"/>
+            <a:ext cx="3243837" cy="369332"/>
+          </a:xfrm>
+          <a:prstGeom prst="rect">
+            <a:avLst/>
+          </a:prstGeom>
+        </p:spPr>
+        <p:txBody>
+          <a:bodyPr wrap="none">
+            <a:spAutoFit/>
+          </a:bodyPr>
+          <a:lstStyle/>
+          <a:p>
+            <a:pPr algn="ctr"/>
+            <a:r>
+              <a:rPr lang="ru-RU" dirty="0">
+                <a:solidFill>
+                  <a:srgbClr val="000000"/>
+                </a:solidFill>
+                <a:latin typeface="Times New Roman" panose="02020603050405020304" pitchFamily="18" charset="0"/>
+                <a:ea typeface="Times New Roman" panose="02020603050405020304" pitchFamily="18" charset="0"/>
+              </a:rPr>
+              <a:t>Скрытие пароля при его вводе </a:t>
+            </a:r>
+            <a:endParaRPr lang="ru-RU" dirty="0"/>
+          </a:p>
+        </p:txBody>
+      </p:sp>
+      <p:sp>
+        <p:nvSpPr>
+          <p:cNvPr id="9" name="Прямоугольник 8"/>
+          <p:cNvSpPr/>
+          <p:nvPr/>
+        </p:nvSpPr>
+        <p:spPr>
+          <a:xfrm>
+            <a:off x="8444277" y="4678076"/>
+            <a:ext cx="3140329" cy="646331"/>
+          </a:xfrm>
+          <a:prstGeom prst="rect">
+            <a:avLst/>
+          </a:prstGeom>
+        </p:spPr>
+        <p:txBody>
+          <a:bodyPr wrap="square" anchor="ctr">
+            <a:spAutoFit/>
+          </a:bodyPr>
+          <a:lstStyle/>
+          <a:p>
+            <a:pPr algn="ctr"/>
+            <a:r>
+              <a:rPr lang="ru-RU" dirty="0">
+                <a:latin typeface="Times New Roman" panose="02020603050405020304" pitchFamily="18" charset="0"/>
+                <a:ea typeface="Times New Roman" panose="02020603050405020304" pitchFamily="18" charset="0"/>
+              </a:rPr>
+              <a:t>Удаление записей только после</a:t>
+            </a:r>
+            <a:r>
+              <a:rPr lang="en-US" dirty="0">
+                <a:latin typeface="Times New Roman" panose="02020603050405020304" pitchFamily="18" charset="0"/>
+                <a:ea typeface="Times New Roman" panose="02020603050405020304" pitchFamily="18" charset="0"/>
+              </a:rPr>
+              <a:t> </a:t>
+            </a:r>
+            <a:r>
+              <a:rPr lang="ru-RU" dirty="0">
+                <a:latin typeface="Times New Roman" panose="02020603050405020304" pitchFamily="18" charset="0"/>
+                <a:ea typeface="Times New Roman" panose="02020603050405020304" pitchFamily="18" charset="0"/>
+              </a:rPr>
+              <a:t>подтверждения </a:t>
+            </a:r>
+            <a:endParaRPr lang="ru-RU" dirty="0"/>
+          </a:p>
+        </p:txBody>
+      </p:sp>
+      <p:pic>
+        <p:nvPicPr>
+          <p:cNvPr id="24" name="Рисунок 23">
             <a:extLst>
               <a:ext uri="{FF2B5EF4-FFF2-40B4-BE49-F238E27FC236}">
-                <a16:creationId xmlns:a16="http://schemas.microsoft.com/office/drawing/2014/main" id="{297AB7B6-453D-4398-9828-8BD2387ED0C3}"/>
+                <a16:creationId xmlns:a16="http://schemas.microsoft.com/office/drawing/2014/main" id="{26D9F968-EB95-47B4-BC75-CC7B8E58711B}"/>
               </a:ext>
             </a:extLst>
           </p:cNvPr>
-          <p:cNvSpPr txBox="1"/>
+          <p:cNvPicPr>
+            <a:picLocks noChangeAspect="1"/>
+          </p:cNvPicPr>
           <p:nvPr/>
-        </p:nvSpPr>
-        <p:spPr>
-          <a:xfrm>
-            <a:off x="757647" y="1073275"/>
-            <a:ext cx="10894423" cy="5969391"/>
+        </p:nvPicPr>
+        <p:blipFill>
+          <a:blip r:embed="rId2"/>
+          <a:stretch>
+            <a:fillRect/>
+          </a:stretch>
+        </p:blipFill>
+        <p:spPr>
+          <a:xfrm>
+            <a:off x="8330305" y="3148891"/>
+            <a:ext cx="3368275" cy="1418221"/>
           </a:xfrm>
           <a:prstGeom prst="rect">
             <a:avLst/>
           </a:prstGeom>
-          <a:noFill/>
-        </p:spPr>
-        <p:txBody>
-          <a:bodyPr wrap="square" rtlCol="0" anchor="ctr">
+        </p:spPr>
+      </p:pic>
+      <p:pic>
+        <p:nvPicPr>
+          <p:cNvPr id="26" name="Рисунок 25">
+            <a:extLst>
+              <a:ext uri="{FF2B5EF4-FFF2-40B4-BE49-F238E27FC236}">
+                <a16:creationId xmlns:a16="http://schemas.microsoft.com/office/drawing/2014/main" id="{4B4FBE4D-8293-4609-9C22-993EF7725BE6}"/>
+              </a:ext>
+            </a:extLst>
+          </p:cNvPr>
+          <p:cNvPicPr>
+            <a:picLocks noChangeAspect="1"/>
+          </p:cNvPicPr>
+          <p:nvPr/>
+        </p:nvPicPr>
+        <p:blipFill>
+          <a:blip r:embed="rId3"/>
+          <a:stretch>
+            <a:fillRect/>
+          </a:stretch>
+        </p:blipFill>
+        <p:spPr>
+          <a:xfrm>
+            <a:off x="3988146" y="5324407"/>
+            <a:ext cx="3377503" cy="1376355"/>
+          </a:xfrm>
+          <a:prstGeom prst="rect">
+            <a:avLst/>
+          </a:prstGeom>
+        </p:spPr>
+      </p:pic>
+      <p:sp>
+        <p:nvSpPr>
+          <p:cNvPr id="15" name="Прямоугольник 14">
+            <a:extLst>
+              <a:ext uri="{FF2B5EF4-FFF2-40B4-BE49-F238E27FC236}">
+                <a16:creationId xmlns:a16="http://schemas.microsoft.com/office/drawing/2014/main" id="{60DEC7E2-3935-48CF-9554-B164967DDAA9}"/>
+              </a:ext>
+            </a:extLst>
+          </p:cNvPr>
+          <p:cNvSpPr/>
+          <p:nvPr/>
+        </p:nvSpPr>
+        <p:spPr>
+          <a:xfrm>
+            <a:off x="156753" y="1283864"/>
+            <a:ext cx="11731353" cy="1175706"/>
+          </a:xfrm>
+          <a:prstGeom prst="rect">
+            <a:avLst/>
+          </a:prstGeom>
+        </p:spPr>
+        <p:txBody>
+          <a:bodyPr wrap="square">
             <a:spAutoFit/>
           </a:bodyPr>
           <a:lstStyle/>
@@ -5734,81 +5432,20 @@
             <a:r>
               <a:rPr lang="ru-RU" sz="2000" dirty="0">
                 <a:effectLst/>
-                <a:latin typeface="Times New Roman" panose="02020603050405020304" pitchFamily="18" charset="0"/>
-                <a:cs typeface="Times New Roman" panose="02020603050405020304" pitchFamily="18" charset="0"/>
-              </a:rPr>
-              <a:t>В качестве аналогов были рассмотрены Битрикс24, </a:t>
-            </a:r>
-            <a:r>
-              <a:rPr lang="ru-RU" sz="2000" dirty="0" err="1">
+              </a:rPr>
+              <a:t>Защита данных </a:t>
+            </a:r>
+            <a:r>
+              <a:rPr lang="en-US" sz="2000" dirty="0">
                 <a:effectLst/>
-                <a:latin typeface="Times New Roman" panose="02020603050405020304" pitchFamily="18" charset="0"/>
-                <a:cs typeface="Times New Roman" panose="02020603050405020304" pitchFamily="18" charset="0"/>
-              </a:rPr>
-              <a:t>amoCRM</a:t>
+              </a:rPr>
+              <a:t>– </a:t>
             </a:r>
             <a:r>
               <a:rPr lang="ru-RU" sz="2000" dirty="0">
                 <a:effectLst/>
-                <a:latin typeface="Times New Roman" panose="02020603050405020304" pitchFamily="18" charset="0"/>
-                <a:cs typeface="Times New Roman" panose="02020603050405020304" pitchFamily="18" charset="0"/>
-              </a:rPr>
-              <a:t>, 1С:Управление нашей фирмой, </a:t>
-            </a:r>
-            <a:r>
-              <a:rPr lang="ru-RU" sz="2000" dirty="0" err="1">
-                <a:effectLst/>
-                <a:latin typeface="Times New Roman" panose="02020603050405020304" pitchFamily="18" charset="0"/>
-                <a:cs typeface="Times New Roman" panose="02020603050405020304" pitchFamily="18" charset="0"/>
-              </a:rPr>
-              <a:t>Trello</a:t>
-            </a:r>
-            <a:r>
-              <a:rPr lang="ru-RU" sz="2000" dirty="0">
-                <a:effectLst/>
-                <a:latin typeface="Times New Roman" panose="02020603050405020304" pitchFamily="18" charset="0"/>
-                <a:cs typeface="Times New Roman" panose="02020603050405020304" pitchFamily="18" charset="0"/>
-              </a:rPr>
-              <a:t> и </a:t>
-            </a:r>
-            <a:r>
-              <a:rPr lang="ru-RU" sz="2000" dirty="0" err="1">
-                <a:effectLst/>
-                <a:latin typeface="Times New Roman" panose="02020603050405020304" pitchFamily="18" charset="0"/>
-                <a:cs typeface="Times New Roman" panose="02020603050405020304" pitchFamily="18" charset="0"/>
-              </a:rPr>
-              <a:t>Asana</a:t>
-            </a:r>
-            <a:r>
-              <a:rPr lang="ru-RU" sz="2000" dirty="0">
-                <a:effectLst/>
-                <a:latin typeface="Times New Roman" panose="02020603050405020304" pitchFamily="18" charset="0"/>
-                <a:cs typeface="Times New Roman" panose="02020603050405020304" pitchFamily="18" charset="0"/>
-              </a:rPr>
-              <a:t>. Большинство аналогов имеют высокую стоимость</a:t>
-            </a:r>
-            <a:r>
-              <a:rPr lang="en-US" sz="2000" dirty="0">
-                <a:effectLst/>
-                <a:latin typeface="Times New Roman" panose="02020603050405020304" pitchFamily="18" charset="0"/>
-                <a:cs typeface="Times New Roman" panose="02020603050405020304" pitchFamily="18" charset="0"/>
-              </a:rPr>
-              <a:t> </a:t>
-            </a:r>
-            <a:r>
-              <a:rPr lang="ru-RU" sz="2000" dirty="0">
-                <a:latin typeface="Times New Roman" panose="02020603050405020304" pitchFamily="18" charset="0"/>
-                <a:cs typeface="Times New Roman" panose="02020603050405020304" pitchFamily="18" charset="0"/>
-              </a:rPr>
-              <a:t>приобретения или подписку</a:t>
-            </a:r>
-            <a:r>
-              <a:rPr lang="ru-RU" sz="2000" dirty="0">
-                <a:effectLst/>
-                <a:latin typeface="Times New Roman" panose="02020603050405020304" pitchFamily="18" charset="0"/>
-                <a:cs typeface="Times New Roman" panose="02020603050405020304" pitchFamily="18" charset="0"/>
-              </a:rPr>
-              <a:t>, зависят от интернет-соединения и сторонних серверов, избыточный функционал и отсутствие расчета стоимости заказов, скидок и надбавок.</a:t>
+              </a:rPr>
+              <a:t>это предотвращение несанкционированного доступа, изменения или удаления информации, а также защита данных при сбоях программных и аппаратных средств.</a:t>
             </a:r>
           </a:p>
           <a:p>
@@ -5820,280 +5457,136 @@
             <a:r>
               <a:rPr lang="ru-RU" sz="2000" dirty="0">
                 <a:effectLst/>
-                <a:latin typeface="Times New Roman" panose="02020603050405020304" pitchFamily="18" charset="0"/>
-                <a:cs typeface="Times New Roman" panose="02020603050405020304" pitchFamily="18" charset="0"/>
-              </a:rPr>
-              <a:t>Преимущества разработанной АИС:</a:t>
-            </a:r>
-            <a:endParaRPr lang="en-US" sz="2000" dirty="0">
-              <a:effectLst/>
-              <a:latin typeface="Times New Roman" panose="02020603050405020304" pitchFamily="18" charset="0"/>
-              <a:cs typeface="Times New Roman" panose="02020603050405020304" pitchFamily="18" charset="0"/>
-            </a:endParaRPr>
-          </a:p>
-          <a:p>
-            <a:pPr marL="0" marR="0" lvl="0" indent="540000" algn="just" defTabSz="914400" rtl="0" eaLnBrk="0" fontAlgn="base" latinLnBrk="0" hangingPunct="0">
-              <a:lnSpc>
-                <a:spcPct val="120000"/>
-              </a:lnSpc>
-              <a:buClrTx/>
-              <a:buSzTx/>
-              <a:tabLst/>
-            </a:pPr>
-            <a:r>
-              <a:rPr lang="en-US" altLang="ru-RU" sz="2000" dirty="0">
-                <a:latin typeface="Times New Roman" panose="02020603050405020304" pitchFamily="18" charset="0"/>
-                <a:cs typeface="Times New Roman" panose="02020603050405020304" pitchFamily="18" charset="0"/>
-              </a:rPr>
-              <a:t>- </a:t>
-            </a:r>
-            <a:r>
-              <a:rPr lang="ru-RU" altLang="ru-RU" sz="2000" dirty="0">
-                <a:latin typeface="Times New Roman" panose="02020603050405020304" pitchFamily="18" charset="0"/>
-                <a:cs typeface="Times New Roman" panose="02020603050405020304" pitchFamily="18" charset="0"/>
-              </a:rPr>
-              <a:t>простой интерфейс, адаптированный под разработку web-сайтов;</a:t>
-            </a:r>
-          </a:p>
-          <a:p>
-            <a:pPr marL="0" marR="0" lvl="0" indent="540000" algn="just" defTabSz="914400" rtl="0" eaLnBrk="0" fontAlgn="base" latinLnBrk="0" hangingPunct="0">
-              <a:lnSpc>
-                <a:spcPct val="120000"/>
-              </a:lnSpc>
-              <a:buClrTx/>
-              <a:buSzTx/>
-              <a:tabLst/>
-            </a:pPr>
-            <a:r>
-              <a:rPr lang="en-US" altLang="ru-RU" sz="2000" dirty="0">
-                <a:latin typeface="Times New Roman" panose="02020603050405020304" pitchFamily="18" charset="0"/>
-                <a:cs typeface="Times New Roman" panose="02020603050405020304" pitchFamily="18" charset="0"/>
-              </a:rPr>
-              <a:t>- </a:t>
-            </a:r>
-            <a:r>
-              <a:rPr lang="ru-RU" altLang="ru-RU" sz="2000" dirty="0">
-                <a:latin typeface="Times New Roman" panose="02020603050405020304" pitchFamily="18" charset="0"/>
-                <a:cs typeface="Times New Roman" panose="02020603050405020304" pitchFamily="18" charset="0"/>
-              </a:rPr>
-              <a:t>разграничение прав доступа для администратора, менеджера и директора;</a:t>
-            </a:r>
-          </a:p>
-          <a:p>
-            <a:pPr marL="0" marR="0" lvl="0" indent="540000" algn="just" defTabSz="914400" rtl="0" eaLnBrk="0" fontAlgn="base" latinLnBrk="0" hangingPunct="0">
-              <a:lnSpc>
-                <a:spcPct val="120000"/>
-              </a:lnSpc>
-              <a:buClrTx/>
-              <a:buSzTx/>
-              <a:tabLst/>
-            </a:pPr>
-            <a:r>
-              <a:rPr lang="en-US" altLang="ru-RU" sz="2000" dirty="0">
-                <a:latin typeface="Times New Roman" panose="02020603050405020304" pitchFamily="18" charset="0"/>
-                <a:cs typeface="Times New Roman" panose="02020603050405020304" pitchFamily="18" charset="0"/>
-              </a:rPr>
-              <a:t>- </a:t>
-            </a:r>
-            <a:r>
-              <a:rPr lang="ru-RU" altLang="ru-RU" sz="2000" dirty="0">
-                <a:latin typeface="Times New Roman" panose="02020603050405020304" pitchFamily="18" charset="0"/>
-                <a:cs typeface="Times New Roman" panose="02020603050405020304" pitchFamily="18" charset="0"/>
-              </a:rPr>
-              <a:t>автоматический расчёт стоимости заказа;</a:t>
-            </a:r>
-          </a:p>
-          <a:p>
-            <a:pPr marL="0" marR="0" lvl="0" indent="540000" algn="just" defTabSz="914400" rtl="0" eaLnBrk="0" fontAlgn="base" latinLnBrk="0" hangingPunct="0">
-              <a:lnSpc>
-                <a:spcPct val="120000"/>
-              </a:lnSpc>
-              <a:buClrTx/>
-              <a:buSzTx/>
-              <a:tabLst/>
-            </a:pPr>
-            <a:r>
-              <a:rPr lang="en-US" altLang="ru-RU" sz="2000" dirty="0">
-                <a:latin typeface="Times New Roman" panose="02020603050405020304" pitchFamily="18" charset="0"/>
-                <a:cs typeface="Times New Roman" panose="02020603050405020304" pitchFamily="18" charset="0"/>
-              </a:rPr>
-              <a:t>- </a:t>
-            </a:r>
-            <a:r>
-              <a:rPr lang="ru-RU" altLang="ru-RU" sz="2000" dirty="0">
-                <a:latin typeface="Times New Roman" panose="02020603050405020304" pitchFamily="18" charset="0"/>
-                <a:cs typeface="Times New Roman" panose="02020603050405020304" pitchFamily="18" charset="0"/>
-              </a:rPr>
-              <a:t>формирование чеков и отчётов в MS Word, MS Excel или PDF;</a:t>
-            </a:r>
-          </a:p>
-          <a:p>
-            <a:pPr marL="0" marR="0" lvl="0" indent="540000" algn="just" defTabSz="914400" rtl="0" eaLnBrk="0" fontAlgn="base" latinLnBrk="0" hangingPunct="0">
-              <a:lnSpc>
-                <a:spcPct val="120000"/>
-              </a:lnSpc>
-              <a:buClrTx/>
-              <a:buSzTx/>
-              <a:tabLst/>
-            </a:pPr>
-            <a:r>
-              <a:rPr lang="en-US" altLang="ru-RU" sz="2000" dirty="0">
-                <a:latin typeface="Times New Roman" panose="02020603050405020304" pitchFamily="18" charset="0"/>
-                <a:cs typeface="Times New Roman" panose="02020603050405020304" pitchFamily="18" charset="0"/>
-              </a:rPr>
-              <a:t>- </a:t>
-            </a:r>
-            <a:r>
-              <a:rPr lang="ru-RU" altLang="ru-RU" sz="2000" dirty="0">
-                <a:latin typeface="Times New Roman" panose="02020603050405020304" pitchFamily="18" charset="0"/>
-                <a:cs typeface="Times New Roman" panose="02020603050405020304" pitchFamily="18" charset="0"/>
-              </a:rPr>
-              <a:t>резервное копирование и защита информации;</a:t>
-            </a:r>
-          </a:p>
-          <a:p>
-            <a:pPr marL="0" marR="0" lvl="0" indent="540000" algn="just" defTabSz="914400" rtl="0" eaLnBrk="0" fontAlgn="base" latinLnBrk="0" hangingPunct="0">
-              <a:lnSpc>
-                <a:spcPct val="120000"/>
-              </a:lnSpc>
-              <a:buClrTx/>
-              <a:buSzTx/>
-              <a:tabLst/>
-            </a:pPr>
-            <a:r>
-              <a:rPr lang="en-US" altLang="ru-RU" sz="2000" dirty="0">
-                <a:latin typeface="Times New Roman" panose="02020603050405020304" pitchFamily="18" charset="0"/>
-                <a:cs typeface="Times New Roman" panose="02020603050405020304" pitchFamily="18" charset="0"/>
-              </a:rPr>
-              <a:t>- </a:t>
-            </a:r>
-            <a:r>
-              <a:rPr lang="ru-RU" altLang="ru-RU" sz="2000" dirty="0">
-                <a:latin typeface="Times New Roman" panose="02020603050405020304" pitchFamily="18" charset="0"/>
-                <a:cs typeface="Times New Roman" panose="02020603050405020304" pitchFamily="18" charset="0"/>
-              </a:rPr>
-              <a:t>автономная работа без зависимости от сторонних сервисов.</a:t>
-            </a:r>
-            <a:endParaRPr lang="ru-RU" sz="2000" dirty="0">
-              <a:latin typeface="Times New Roman" panose="02020603050405020304" pitchFamily="18" charset="0"/>
-              <a:cs typeface="Times New Roman" panose="02020603050405020304" pitchFamily="18" charset="0"/>
-            </a:endParaRPr>
-          </a:p>
-          <a:p>
-            <a:pPr>
-              <a:lnSpc>
-                <a:spcPct val="120000"/>
-              </a:lnSpc>
-            </a:pPr>
-            <a:r>
-              <a:rPr lang="ru-RU" sz="2000" b="1" dirty="0">
-                <a:effectLst/>
-                <a:latin typeface="Times New Roman" panose="02020603050405020304" pitchFamily="18" charset="0"/>
-                <a:cs typeface="Times New Roman" panose="02020603050405020304" pitchFamily="18" charset="0"/>
-              </a:rPr>
-              <a:t>Цена разработки </a:t>
-            </a:r>
-            <a:r>
-              <a:rPr lang="ru-RU" sz="2000" dirty="0">
-                <a:effectLst/>
-                <a:latin typeface="Times New Roman" panose="02020603050405020304" pitchFamily="18" charset="0"/>
-                <a:cs typeface="Times New Roman" panose="02020603050405020304" pitchFamily="18" charset="0"/>
-              </a:rPr>
-              <a:t>– 27 433,12 руб.</a:t>
-            </a:r>
-          </a:p>
-          <a:p>
-            <a:pPr>
-              <a:lnSpc>
-                <a:spcPct val="120000"/>
-              </a:lnSpc>
-            </a:pPr>
-            <a:r>
-              <a:rPr lang="ru-RU" sz="2000" b="1" dirty="0">
-                <a:latin typeface="Times New Roman" panose="02020603050405020304" pitchFamily="18" charset="0"/>
-                <a:cs typeface="Times New Roman" panose="02020603050405020304" pitchFamily="18" charset="0"/>
-              </a:rPr>
-              <a:t>Отпускная цена одной копии </a:t>
-            </a:r>
-            <a:r>
-              <a:rPr lang="ru-RU" sz="2000" dirty="0">
-                <a:effectLst/>
-                <a:latin typeface="Times New Roman" panose="02020603050405020304" pitchFamily="18" charset="0"/>
-                <a:cs typeface="Times New Roman" panose="02020603050405020304" pitchFamily="18" charset="0"/>
-              </a:rPr>
-              <a:t>–</a:t>
-            </a:r>
-            <a:r>
-              <a:rPr lang="ru-RU" sz="2000" dirty="0">
-                <a:latin typeface="Times New Roman" panose="02020603050405020304" pitchFamily="18" charset="0"/>
-                <a:cs typeface="Times New Roman" panose="02020603050405020304" pitchFamily="18" charset="0"/>
-              </a:rPr>
-              <a:t> 200 руб.</a:t>
-            </a:r>
-            <a:br>
-              <a:rPr lang="ru-RU" sz="2000" dirty="0">
-                <a:effectLst/>
-                <a:latin typeface="Times New Roman" panose="02020603050405020304" pitchFamily="18" charset="0"/>
-                <a:cs typeface="Times New Roman" panose="02020603050405020304" pitchFamily="18" charset="0"/>
-              </a:rPr>
-            </a:br>
-            <a:r>
-              <a:rPr lang="ru-RU" sz="2000" b="1" dirty="0">
-                <a:effectLst/>
-                <a:latin typeface="Times New Roman" panose="02020603050405020304" pitchFamily="18" charset="0"/>
-                <a:cs typeface="Times New Roman" panose="02020603050405020304" pitchFamily="18" charset="0"/>
-              </a:rPr>
-              <a:t>Прогнозируемая выручка </a:t>
-            </a:r>
-            <a:r>
-              <a:rPr lang="ru-RU" sz="2000" dirty="0">
-                <a:effectLst/>
-                <a:latin typeface="Times New Roman" panose="02020603050405020304" pitchFamily="18" charset="0"/>
-                <a:cs typeface="Times New Roman" panose="02020603050405020304" pitchFamily="18" charset="0"/>
-              </a:rPr>
-              <a:t>– 35 400 руб./год.</a:t>
-            </a:r>
-            <a:br>
-              <a:rPr lang="ru-RU" sz="2000" dirty="0">
-                <a:effectLst/>
-                <a:latin typeface="Times New Roman" panose="02020603050405020304" pitchFamily="18" charset="0"/>
-                <a:cs typeface="Times New Roman" panose="02020603050405020304" pitchFamily="18" charset="0"/>
-              </a:rPr>
-            </a:br>
-            <a:r>
-              <a:rPr lang="ru-RU" sz="2000" b="1" dirty="0">
-                <a:effectLst/>
-                <a:latin typeface="Times New Roman" panose="02020603050405020304" pitchFamily="18" charset="0"/>
-                <a:cs typeface="Times New Roman" panose="02020603050405020304" pitchFamily="18" charset="0"/>
-              </a:rPr>
-              <a:t>Срок окупаемости </a:t>
-            </a:r>
-            <a:r>
-              <a:rPr lang="ru-RU" sz="2000" dirty="0">
-                <a:effectLst/>
-                <a:latin typeface="Times New Roman" panose="02020603050405020304" pitchFamily="18" charset="0"/>
-                <a:cs typeface="Times New Roman" panose="02020603050405020304" pitchFamily="18" charset="0"/>
-              </a:rPr>
-              <a:t>– около 11 месяцев.</a:t>
-            </a:r>
-          </a:p>
-          <a:p>
-            <a:pPr indent="540000" algn="just">
-              <a:lnSpc>
-                <a:spcPct val="120000"/>
-              </a:lnSpc>
-            </a:pPr>
-            <a:endParaRPr lang="ru-RU" sz="2000" dirty="0">
-              <a:latin typeface="Times New Roman" panose="02020603050405020304" pitchFamily="18" charset="0"/>
-              <a:cs typeface="Times New Roman" panose="02020603050405020304" pitchFamily="18" charset="0"/>
-            </a:endParaRPr>
-          </a:p>
-        </p:txBody>
-      </p:sp>
+              </a:rPr>
+              <a:t>В разработанной АИС применяются следующие меры защиты информации:</a:t>
+            </a:r>
+          </a:p>
+        </p:txBody>
+      </p:sp>
+      <p:pic>
+        <p:nvPicPr>
+          <p:cNvPr id="10" name="Рисунок 9">
+            <a:extLst>
+              <a:ext uri="{FF2B5EF4-FFF2-40B4-BE49-F238E27FC236}">
+                <a16:creationId xmlns:a16="http://schemas.microsoft.com/office/drawing/2014/main" id="{5BB08106-93E1-4F2E-9243-143F9593C532}"/>
+              </a:ext>
+            </a:extLst>
+          </p:cNvPr>
+          <p:cNvPicPr>
+            <a:picLocks noChangeAspect="1"/>
+          </p:cNvPicPr>
+          <p:nvPr/>
+        </p:nvPicPr>
+        <p:blipFill>
+          <a:blip r:embed="rId4"/>
+          <a:stretch>
+            <a:fillRect/>
+          </a:stretch>
+        </p:blipFill>
+        <p:spPr>
+          <a:xfrm>
+            <a:off x="126114" y="3118790"/>
+            <a:ext cx="3235511" cy="2325633"/>
+          </a:xfrm>
+          <a:prstGeom prst="rect">
+            <a:avLst/>
+          </a:prstGeom>
+        </p:spPr>
+      </p:pic>
+      <p:pic>
+        <p:nvPicPr>
+          <p:cNvPr id="12" name="Рисунок 11">
+            <a:extLst>
+              <a:ext uri="{FF2B5EF4-FFF2-40B4-BE49-F238E27FC236}">
+                <a16:creationId xmlns:a16="http://schemas.microsoft.com/office/drawing/2014/main" id="{320124AA-6DE5-4AA9-9A9A-015724B11A40}"/>
+              </a:ext>
+            </a:extLst>
+          </p:cNvPr>
+          <p:cNvPicPr>
+            <a:picLocks noChangeAspect="1"/>
+          </p:cNvPicPr>
+          <p:nvPr/>
+        </p:nvPicPr>
+        <p:blipFill>
+          <a:blip r:embed="rId5"/>
+          <a:stretch>
+            <a:fillRect/>
+          </a:stretch>
+        </p:blipFill>
+        <p:spPr>
+          <a:xfrm>
+            <a:off x="3526971" y="2904153"/>
+            <a:ext cx="4604040" cy="686031"/>
+          </a:xfrm>
+          <a:prstGeom prst="rect">
+            <a:avLst/>
+          </a:prstGeom>
+        </p:spPr>
+      </p:pic>
+      <p:pic>
+        <p:nvPicPr>
+          <p:cNvPr id="17" name="Рисунок 16">
+            <a:extLst>
+              <a:ext uri="{FF2B5EF4-FFF2-40B4-BE49-F238E27FC236}">
+                <a16:creationId xmlns:a16="http://schemas.microsoft.com/office/drawing/2014/main" id="{6BADC123-67EF-48DF-AFE2-8B31D01302DC}"/>
+              </a:ext>
+            </a:extLst>
+          </p:cNvPr>
+          <p:cNvPicPr>
+            <a:picLocks noChangeAspect="1"/>
+          </p:cNvPicPr>
+          <p:nvPr/>
+        </p:nvPicPr>
+        <p:blipFill>
+          <a:blip r:embed="rId6"/>
+          <a:stretch>
+            <a:fillRect/>
+          </a:stretch>
+        </p:blipFill>
+        <p:spPr>
+          <a:xfrm>
+            <a:off x="4141752" y="4058865"/>
+            <a:ext cx="3334215" cy="619211"/>
+          </a:xfrm>
+          <a:prstGeom prst="rect">
+            <a:avLst/>
+          </a:prstGeom>
+        </p:spPr>
+      </p:pic>
+      <p:pic>
+        <p:nvPicPr>
+          <p:cNvPr id="20" name="Рисунок 19">
+            <a:extLst>
+              <a:ext uri="{FF2B5EF4-FFF2-40B4-BE49-F238E27FC236}">
+                <a16:creationId xmlns:a16="http://schemas.microsoft.com/office/drawing/2014/main" id="{29DB95E1-CF40-4BE9-BC72-C0060C78F078}"/>
+              </a:ext>
+            </a:extLst>
+          </p:cNvPr>
+          <p:cNvPicPr>
+            <a:picLocks noChangeAspect="1"/>
+          </p:cNvPicPr>
+          <p:nvPr/>
+        </p:nvPicPr>
+        <p:blipFill>
+          <a:blip r:embed="rId7"/>
+          <a:stretch>
+            <a:fillRect/>
+          </a:stretch>
+        </p:blipFill>
+        <p:spPr>
+          <a:xfrm>
+            <a:off x="8323517" y="5324407"/>
+            <a:ext cx="3381847" cy="1448002"/>
+          </a:xfrm>
+          <a:prstGeom prst="rect">
+            <a:avLst/>
+          </a:prstGeom>
+        </p:spPr>
+      </p:pic>
     </p:spTree>
     <p:extLst>
       <p:ext uri="{BB962C8B-B14F-4D97-AF65-F5344CB8AC3E}">
-        <p14:creationId xmlns:p14="http://schemas.microsoft.com/office/powerpoint/2010/main" val="399859881"/>
+        <p14:creationId xmlns:p14="http://schemas.microsoft.com/office/powerpoint/2010/main" val="2838169731"/>
       </p:ext>
     </p:extLst>
   </p:cSld>
@@ -6122,118 +5615,6 @@
       </p:grpSpPr>
       <p:sp>
         <p:nvSpPr>
-          <p:cNvPr id="2" name="Прямоугольник 1"/>
-          <p:cNvSpPr/>
-          <p:nvPr/>
-        </p:nvSpPr>
-        <p:spPr>
-          <a:xfrm>
-            <a:off x="742950" y="1257941"/>
-            <a:ext cx="10987496" cy="5600059"/>
-          </a:xfrm>
-          <a:prstGeom prst="rect">
-            <a:avLst/>
-          </a:prstGeom>
-        </p:spPr>
-        <p:txBody>
-          <a:bodyPr wrap="square" anchor="ctr">
-            <a:spAutoFit/>
-          </a:bodyPr>
-          <a:lstStyle/>
-          <a:p>
-            <a:pPr indent="540000">
-              <a:lnSpc>
-                <a:spcPct val="120000"/>
-              </a:lnSpc>
-            </a:pPr>
-            <a:r>
-              <a:rPr lang="ru-RU" sz="2000" dirty="0">
-                <a:effectLst/>
-                <a:latin typeface="Times New Roman" panose="02020603050405020304" pitchFamily="18" charset="0"/>
-                <a:cs typeface="Times New Roman" panose="02020603050405020304" pitchFamily="18" charset="0"/>
-              </a:rPr>
-              <a:t>В ходе выполнения выпускной квалификационной работы была разработана автоматизированная информационная система по ведению базы данных разработки web-сайтов на базе платформы .NET.</a:t>
-            </a:r>
-          </a:p>
-          <a:p>
-            <a:pPr indent="540000">
-              <a:lnSpc>
-                <a:spcPct val="120000"/>
-              </a:lnSpc>
-            </a:pPr>
-            <a:r>
-              <a:rPr lang="ru-RU" sz="2000" dirty="0">
-                <a:latin typeface="Times New Roman" panose="02020603050405020304" pitchFamily="18" charset="0"/>
-              </a:rPr>
-              <a:t>В процессе написания программного кода использовался высокоуровневый язык программирования </a:t>
-            </a:r>
-            <a:r>
-              <a:rPr lang="en-US" sz="2000" dirty="0">
-                <a:latin typeface="Times New Roman" panose="02020603050405020304" pitchFamily="18" charset="0"/>
-              </a:rPr>
-              <a:t>C#</a:t>
-            </a:r>
-            <a:r>
-              <a:rPr lang="ru-RU" sz="2000" dirty="0">
-                <a:latin typeface="Times New Roman" panose="02020603050405020304" pitchFamily="18" charset="0"/>
-              </a:rPr>
-              <a:t>. Были улучшены навыки по работе с платформой .NET. </a:t>
-            </a:r>
-            <a:endParaRPr lang="ru-RU" sz="2000" dirty="0">
-              <a:effectLst/>
-              <a:latin typeface="Times New Roman" panose="02020603050405020304" pitchFamily="18" charset="0"/>
-              <a:cs typeface="Times New Roman" panose="02020603050405020304" pitchFamily="18" charset="0"/>
-            </a:endParaRPr>
-          </a:p>
-          <a:p>
-            <a:pPr indent="540000">
-              <a:lnSpc>
-                <a:spcPct val="120000"/>
-              </a:lnSpc>
-            </a:pPr>
-            <a:r>
-              <a:rPr lang="ru-RU" sz="2000" dirty="0">
-                <a:effectLst/>
-                <a:latin typeface="Times New Roman" panose="02020603050405020304" pitchFamily="18" charset="0"/>
-                <a:cs typeface="Times New Roman" panose="02020603050405020304" pitchFamily="18" charset="0"/>
-              </a:rPr>
-              <a:t>Разработанная система полностью соответствует поставленным задачам и позволяет автоматизировать учёт клиентов, услуг и заказов, оформление заказов, расчёт стоимости, контроль сроков выполнения, формирование чеков и отчётов.</a:t>
-            </a:r>
-          </a:p>
-          <a:p>
-            <a:pPr indent="540000">
-              <a:lnSpc>
-                <a:spcPct val="120000"/>
-              </a:lnSpc>
-            </a:pPr>
-            <a:r>
-              <a:rPr lang="ru-RU" sz="2000" dirty="0">
-                <a:effectLst/>
-                <a:latin typeface="Times New Roman" panose="02020603050405020304" pitchFamily="18" charset="0"/>
-                <a:cs typeface="Times New Roman" panose="02020603050405020304" pitchFamily="18" charset="0"/>
-              </a:rPr>
-              <a:t>В программе реализовано разграничение прав доступа для трёх ролей, поиск, сортировка и фильтрация данных, резервное копирование и восстановление базы данных, импорт и экспорт данных, CAPTCHA при авторизации, пагинация, защита персональных данных и автоматическая блокировка системы при отсутствии активности пользователя.</a:t>
-            </a:r>
-          </a:p>
-          <a:p>
-            <a:pPr indent="540000">
-              <a:lnSpc>
-                <a:spcPct val="120000"/>
-              </a:lnSpc>
-            </a:pPr>
-            <a:r>
-              <a:rPr lang="ru-RU" sz="2000" dirty="0">
-                <a:effectLst/>
-                <a:latin typeface="Times New Roman" panose="02020603050405020304" pitchFamily="18" charset="0"/>
-                <a:cs typeface="Times New Roman" panose="02020603050405020304" pitchFamily="18" charset="0"/>
-              </a:rPr>
-              <a:t>В дальнейшем программный продукт может быть усовершенствован путём доработки интерфейса, расширения функционала отчётов и адаптации системы под требования конкретных организаций, занимающихся разработкой web-сайтов.</a:t>
-            </a:r>
-          </a:p>
-        </p:txBody>
-      </p:sp>
-      <p:sp>
-        <p:nvSpPr>
           <p:cNvPr id="3" name="Заголовок 1"/>
           <p:cNvSpPr txBox="1">
             <a:spLocks/>
@@ -6289,6 +5670,1164 @@
                 </a:solidFill>
                 <a:latin typeface="Corbel (Заголовки)"/>
               </a:rPr>
+              <a:t>Применяемые меры защиты</a:t>
+            </a:r>
+          </a:p>
+        </p:txBody>
+      </p:sp>
+      <p:sp>
+        <p:nvSpPr>
+          <p:cNvPr id="4" name="Прямоугольник 3"/>
+          <p:cNvSpPr/>
+          <p:nvPr/>
+        </p:nvSpPr>
+        <p:spPr>
+          <a:xfrm>
+            <a:off x="3198354" y="1296288"/>
+            <a:ext cx="3333750" cy="369332"/>
+          </a:xfrm>
+          <a:prstGeom prst="rect">
+            <a:avLst/>
+          </a:prstGeom>
+        </p:spPr>
+        <p:txBody>
+          <a:bodyPr wrap="square" anchor="ctr">
+            <a:spAutoFit/>
+          </a:bodyPr>
+          <a:lstStyle/>
+          <a:p>
+            <a:pPr algn="ctr"/>
+            <a:r>
+              <a:rPr lang="ru-RU" dirty="0">
+                <a:solidFill>
+                  <a:srgbClr val="000000"/>
+                </a:solidFill>
+                <a:latin typeface="Times New Roman" panose="02020603050405020304" pitchFamily="18" charset="0"/>
+              </a:rPr>
+              <a:t>Парольная защита базы данных</a:t>
+            </a:r>
+            <a:endParaRPr lang="ru-RU" dirty="0"/>
+          </a:p>
+        </p:txBody>
+      </p:sp>
+      <p:sp>
+        <p:nvSpPr>
+          <p:cNvPr id="5" name="Прямоугольник 4"/>
+          <p:cNvSpPr/>
+          <p:nvPr/>
+        </p:nvSpPr>
+        <p:spPr>
+          <a:xfrm>
+            <a:off x="1114853" y="1209675"/>
+            <a:ext cx="1261884" cy="458074"/>
+          </a:xfrm>
+          <a:prstGeom prst="rect">
+            <a:avLst/>
+          </a:prstGeom>
+        </p:spPr>
+        <p:txBody>
+          <a:bodyPr wrap="none" anchor="ctr">
+            <a:spAutoFit/>
+          </a:bodyPr>
+          <a:lstStyle/>
+          <a:p>
+            <a:pPr lvl="0" algn="ctr">
+              <a:lnSpc>
+                <a:spcPct val="150000"/>
+              </a:lnSpc>
+              <a:spcAft>
+                <a:spcPts val="0"/>
+              </a:spcAft>
+              <a:tabLst>
+                <a:tab pos="450215" algn="l"/>
+                <a:tab pos="900430" algn="l"/>
+                <a:tab pos="990600" algn="l"/>
+              </a:tabLst>
+            </a:pPr>
+            <a:r>
+              <a:rPr lang="en-US" dirty="0">
+                <a:solidFill>
+                  <a:srgbClr val="000000"/>
+                </a:solidFill>
+                <a:latin typeface="Times New Roman" panose="02020603050405020304" pitchFamily="18" charset="0"/>
+                <a:ea typeface="Times New Roman" panose="02020603050405020304" pitchFamily="18" charset="0"/>
+              </a:rPr>
+              <a:t>CAPTCHA</a:t>
+            </a:r>
+            <a:endParaRPr lang="ru-RU" sz="1100" dirty="0">
+              <a:effectLst/>
+              <a:latin typeface="Times New Roman" panose="02020603050405020304" pitchFamily="18" charset="0"/>
+              <a:ea typeface="Times New Roman" panose="02020603050405020304" pitchFamily="18" charset="0"/>
+            </a:endParaRPr>
+          </a:p>
+        </p:txBody>
+      </p:sp>
+      <p:sp>
+        <p:nvSpPr>
+          <p:cNvPr id="6" name="Прямоугольник 5"/>
+          <p:cNvSpPr/>
+          <p:nvPr/>
+        </p:nvSpPr>
+        <p:spPr>
+          <a:xfrm>
+            <a:off x="-56250" y="3862964"/>
+            <a:ext cx="3847228" cy="646331"/>
+          </a:xfrm>
+          <a:prstGeom prst="rect">
+            <a:avLst/>
+          </a:prstGeom>
+        </p:spPr>
+        <p:txBody>
+          <a:bodyPr wrap="square" anchor="ctr">
+            <a:spAutoFit/>
+          </a:bodyPr>
+          <a:lstStyle/>
+          <a:p>
+            <a:pPr algn="ctr"/>
+            <a:r>
+              <a:rPr lang="ru-RU" dirty="0">
+                <a:solidFill>
+                  <a:srgbClr val="000000"/>
+                </a:solidFill>
+                <a:latin typeface="Times New Roman" panose="02020603050405020304" pitchFamily="18" charset="0"/>
+              </a:rPr>
+              <a:t>Резервное копирование и восстановление базы данных</a:t>
+            </a:r>
+            <a:endParaRPr lang="ru-RU" dirty="0"/>
+          </a:p>
+        </p:txBody>
+      </p:sp>
+      <p:sp>
+        <p:nvSpPr>
+          <p:cNvPr id="8" name="Прямоугольник 7"/>
+          <p:cNvSpPr/>
+          <p:nvPr/>
+        </p:nvSpPr>
+        <p:spPr>
+          <a:xfrm>
+            <a:off x="6629677" y="4232366"/>
+            <a:ext cx="4017254" cy="369332"/>
+          </a:xfrm>
+          <a:prstGeom prst="rect">
+            <a:avLst/>
+          </a:prstGeom>
+        </p:spPr>
+        <p:txBody>
+          <a:bodyPr wrap="none">
+            <a:spAutoFit/>
+          </a:bodyPr>
+          <a:lstStyle/>
+          <a:p>
+            <a:pPr algn="ctr"/>
+            <a:r>
+              <a:rPr lang="ru-RU" dirty="0">
+                <a:solidFill>
+                  <a:srgbClr val="000000"/>
+                </a:solidFill>
+                <a:latin typeface="Times New Roman" panose="02020603050405020304" pitchFamily="18" charset="0"/>
+                <a:ea typeface="Times New Roman" panose="02020603050405020304" pitchFamily="18" charset="0"/>
+              </a:rPr>
+              <a:t>Подтверждение выхода из приложения</a:t>
+            </a:r>
+            <a:endParaRPr lang="ru-RU" dirty="0"/>
+          </a:p>
+        </p:txBody>
+      </p:sp>
+      <p:sp>
+        <p:nvSpPr>
+          <p:cNvPr id="9" name="Прямоугольник 8"/>
+          <p:cNvSpPr/>
+          <p:nvPr/>
+        </p:nvSpPr>
+        <p:spPr>
+          <a:xfrm>
+            <a:off x="6822288" y="1296288"/>
+            <a:ext cx="3433383" cy="369332"/>
+          </a:xfrm>
+          <a:prstGeom prst="rect">
+            <a:avLst/>
+          </a:prstGeom>
+        </p:spPr>
+        <p:txBody>
+          <a:bodyPr wrap="square" anchor="ctr">
+            <a:spAutoFit/>
+          </a:bodyPr>
+          <a:lstStyle/>
+          <a:p>
+            <a:pPr algn="ctr"/>
+            <a:r>
+              <a:rPr lang="ru-RU" dirty="0">
+                <a:latin typeface="Times New Roman" panose="02020603050405020304" pitchFamily="18" charset="0"/>
+              </a:rPr>
+              <a:t>Контроль вводимой информации</a:t>
+            </a:r>
+            <a:endParaRPr lang="ru-RU" dirty="0"/>
+          </a:p>
+        </p:txBody>
+      </p:sp>
+      <p:pic>
+        <p:nvPicPr>
+          <p:cNvPr id="11" name="Рисунок 10">
+            <a:extLst>
+              <a:ext uri="{FF2B5EF4-FFF2-40B4-BE49-F238E27FC236}">
+                <a16:creationId xmlns:a16="http://schemas.microsoft.com/office/drawing/2014/main" id="{ED30AA15-F178-4671-8FE1-F880C73296E6}"/>
+              </a:ext>
+            </a:extLst>
+          </p:cNvPr>
+          <p:cNvPicPr>
+            <a:picLocks noChangeAspect="1"/>
+          </p:cNvPicPr>
+          <p:nvPr/>
+        </p:nvPicPr>
+        <p:blipFill>
+          <a:blip r:embed="rId2"/>
+          <a:stretch>
+            <a:fillRect/>
+          </a:stretch>
+        </p:blipFill>
+        <p:spPr>
+          <a:xfrm>
+            <a:off x="302499" y="1665620"/>
+            <a:ext cx="2886592" cy="2179883"/>
+          </a:xfrm>
+          <a:prstGeom prst="rect">
+            <a:avLst/>
+          </a:prstGeom>
+        </p:spPr>
+      </p:pic>
+      <p:pic>
+        <p:nvPicPr>
+          <p:cNvPr id="14" name="Рисунок 13">
+            <a:extLst>
+              <a:ext uri="{FF2B5EF4-FFF2-40B4-BE49-F238E27FC236}">
+                <a16:creationId xmlns:a16="http://schemas.microsoft.com/office/drawing/2014/main" id="{A609E437-69E5-49D6-831E-352F2AAA29AF}"/>
+              </a:ext>
+            </a:extLst>
+          </p:cNvPr>
+          <p:cNvPicPr>
+            <a:picLocks noChangeAspect="1"/>
+          </p:cNvPicPr>
+          <p:nvPr/>
+        </p:nvPicPr>
+        <p:blipFill>
+          <a:blip r:embed="rId3"/>
+          <a:stretch>
+            <a:fillRect/>
+          </a:stretch>
+        </p:blipFill>
+        <p:spPr>
+          <a:xfrm>
+            <a:off x="3702171" y="1665620"/>
+            <a:ext cx="2326116" cy="3946974"/>
+          </a:xfrm>
+          <a:prstGeom prst="rect">
+            <a:avLst/>
+          </a:prstGeom>
+        </p:spPr>
+      </p:pic>
+      <p:pic>
+        <p:nvPicPr>
+          <p:cNvPr id="18" name="Рисунок 17">
+            <a:extLst>
+              <a:ext uri="{FF2B5EF4-FFF2-40B4-BE49-F238E27FC236}">
+                <a16:creationId xmlns:a16="http://schemas.microsoft.com/office/drawing/2014/main" id="{AD2BB2FC-0BEC-4708-B15B-191F24636E5A}"/>
+              </a:ext>
+            </a:extLst>
+          </p:cNvPr>
+          <p:cNvPicPr>
+            <a:picLocks noChangeAspect="1"/>
+          </p:cNvPicPr>
+          <p:nvPr/>
+        </p:nvPicPr>
+        <p:blipFill>
+          <a:blip r:embed="rId4"/>
+          <a:stretch>
+            <a:fillRect/>
+          </a:stretch>
+        </p:blipFill>
+        <p:spPr>
+          <a:xfrm>
+            <a:off x="322741" y="4473972"/>
+            <a:ext cx="3089246" cy="2348705"/>
+          </a:xfrm>
+          <a:prstGeom prst="rect">
+            <a:avLst/>
+          </a:prstGeom>
+        </p:spPr>
+      </p:pic>
+      <p:pic>
+        <p:nvPicPr>
+          <p:cNvPr id="23" name="Рисунок 22">
+            <a:extLst>
+              <a:ext uri="{FF2B5EF4-FFF2-40B4-BE49-F238E27FC236}">
+                <a16:creationId xmlns:a16="http://schemas.microsoft.com/office/drawing/2014/main" id="{D4EE2ECB-77B1-42E1-8F7B-9512C96BE738}"/>
+              </a:ext>
+            </a:extLst>
+          </p:cNvPr>
+          <p:cNvPicPr/>
+          <p:nvPr/>
+        </p:nvPicPr>
+        <p:blipFill>
+          <a:blip r:embed="rId5"/>
+          <a:stretch>
+            <a:fillRect/>
+          </a:stretch>
+        </p:blipFill>
+        <p:spPr>
+          <a:xfrm>
+            <a:off x="7003992" y="1665620"/>
+            <a:ext cx="3069974" cy="2584163"/>
+          </a:xfrm>
+          <a:prstGeom prst="rect">
+            <a:avLst/>
+          </a:prstGeom>
+        </p:spPr>
+      </p:pic>
+      <p:pic>
+        <p:nvPicPr>
+          <p:cNvPr id="22" name="Рисунок 21">
+            <a:extLst>
+              <a:ext uri="{FF2B5EF4-FFF2-40B4-BE49-F238E27FC236}">
+                <a16:creationId xmlns:a16="http://schemas.microsoft.com/office/drawing/2014/main" id="{79DD2F45-61E8-425A-AD52-BD0C0CAE9EA9}"/>
+              </a:ext>
+            </a:extLst>
+          </p:cNvPr>
+          <p:cNvPicPr>
+            <a:picLocks noChangeAspect="1"/>
+          </p:cNvPicPr>
+          <p:nvPr/>
+        </p:nvPicPr>
+        <p:blipFill>
+          <a:blip r:embed="rId6"/>
+          <a:stretch>
+            <a:fillRect/>
+          </a:stretch>
+        </p:blipFill>
+        <p:spPr>
+          <a:xfrm>
+            <a:off x="6933091" y="4619115"/>
+            <a:ext cx="3410426" cy="1448002"/>
+          </a:xfrm>
+          <a:prstGeom prst="rect">
+            <a:avLst/>
+          </a:prstGeom>
+        </p:spPr>
+      </p:pic>
+    </p:spTree>
+    <p:extLst>
+      <p:ext uri="{BB962C8B-B14F-4D97-AF65-F5344CB8AC3E}">
+        <p14:creationId xmlns:p14="http://schemas.microsoft.com/office/powerpoint/2010/main" val="1726839924"/>
+      </p:ext>
+    </p:extLst>
+  </p:cSld>
+  <p:clrMapOvr>
+    <a:masterClrMapping/>
+  </p:clrMapOvr>
+</p:sld>
+</file>
+
+<file path=ppt/slides/slide19.xml><?xml version="1.0" encoding="utf-8"?>
+<p:sld xmlns:a="http://schemas.openxmlformats.org/drawingml/2006/main" xmlns:r="http://schemas.openxmlformats.org/officeDocument/2006/relationships" xmlns:p="http://schemas.openxmlformats.org/presentationml/2006/main">
+  <p:cSld>
+    <p:spTree>
+      <p:nvGrpSpPr>
+        <p:cNvPr id="1" name=""/>
+        <p:cNvGrpSpPr/>
+        <p:nvPr/>
+      </p:nvGrpSpPr>
+      <p:grpSpPr>
+        <a:xfrm>
+          <a:off x="0" y="0"/>
+          <a:ext cx="0" cy="0"/>
+          <a:chOff x="0" y="0"/>
+          <a:chExt cx="0" cy="0"/>
+        </a:xfrm>
+      </p:grpSpPr>
+      <p:sp>
+        <p:nvSpPr>
+          <p:cNvPr id="3" name="Заголовок 1"/>
+          <p:cNvSpPr txBox="1">
+            <a:spLocks/>
+          </p:cNvSpPr>
+          <p:nvPr/>
+        </p:nvSpPr>
+        <p:spPr>
+          <a:xfrm>
+            <a:off x="0" y="450850"/>
+            <a:ext cx="12192000" cy="758825"/>
+          </a:xfrm>
+          <a:prstGeom prst="rect">
+            <a:avLst/>
+          </a:prstGeom>
+          <a:solidFill>
+            <a:srgbClr val="00B0F0"/>
+          </a:solidFill>
+          <a:ln>
+            <a:solidFill>
+              <a:srgbClr val="00B0F0"/>
+            </a:solidFill>
+          </a:ln>
+        </p:spPr>
+        <p:txBody>
+          <a:bodyPr anchor="ctr">
+            <a:normAutofit/>
+          </a:bodyPr>
+          <a:lstStyle>
+            <a:lvl1pPr algn="l" defTabSz="914400" rtl="0" eaLnBrk="1" latinLnBrk="0" hangingPunct="1">
+              <a:lnSpc>
+                <a:spcPct val="90000"/>
+              </a:lnSpc>
+              <a:spcBef>
+                <a:spcPct val="0"/>
+              </a:spcBef>
+              <a:buNone/>
+              <a:defRPr sz="4400" kern="1200">
+                <a:solidFill>
+                  <a:schemeClr val="tx1"/>
+                </a:solidFill>
+                <a:latin typeface="+mj-lt"/>
+                <a:ea typeface="+mj-ea"/>
+                <a:cs typeface="+mj-cs"/>
+              </a:defRPr>
+            </a:lvl1pPr>
+          </a:lstStyle>
+          <a:p>
+            <a:pPr algn="ctr"/>
+            <a:r>
+              <a:rPr lang="ru-RU" sz="4000" dirty="0">
+                <a:solidFill>
+                  <a:schemeClr val="bg1"/>
+                </a:solidFill>
+                <a:latin typeface="Corbel (Заголовки)"/>
+              </a:rPr>
+              <a:t>Обоснование экономической эффективности</a:t>
+            </a:r>
+          </a:p>
+        </p:txBody>
+      </p:sp>
+      <p:sp>
+        <p:nvSpPr>
+          <p:cNvPr id="2" name="TextBox 1">
+            <a:extLst>
+              <a:ext uri="{FF2B5EF4-FFF2-40B4-BE49-F238E27FC236}">
+                <a16:creationId xmlns:a16="http://schemas.microsoft.com/office/drawing/2014/main" id="{297AB7B6-453D-4398-9828-8BD2387ED0C3}"/>
+              </a:ext>
+            </a:extLst>
+          </p:cNvPr>
+          <p:cNvSpPr txBox="1"/>
+          <p:nvPr/>
+        </p:nvSpPr>
+        <p:spPr>
+          <a:xfrm>
+            <a:off x="757647" y="1073275"/>
+            <a:ext cx="10894423" cy="5969391"/>
+          </a:xfrm>
+          <a:prstGeom prst="rect">
+            <a:avLst/>
+          </a:prstGeom>
+          <a:noFill/>
+        </p:spPr>
+        <p:txBody>
+          <a:bodyPr wrap="square" rtlCol="0" anchor="ctr">
+            <a:spAutoFit/>
+          </a:bodyPr>
+          <a:lstStyle/>
+          <a:p>
+            <a:pPr indent="540000" algn="just">
+              <a:lnSpc>
+                <a:spcPct val="120000"/>
+              </a:lnSpc>
+            </a:pPr>
+            <a:r>
+              <a:rPr lang="ru-RU" sz="2000" dirty="0">
+                <a:effectLst/>
+                <a:latin typeface="Times New Roman" panose="02020603050405020304" pitchFamily="18" charset="0"/>
+                <a:cs typeface="Times New Roman" panose="02020603050405020304" pitchFamily="18" charset="0"/>
+              </a:rPr>
+              <a:t>В качестве аналогов были рассмотрены Битрикс24, </a:t>
+            </a:r>
+            <a:r>
+              <a:rPr lang="ru-RU" sz="2000" dirty="0" err="1">
+                <a:effectLst/>
+                <a:latin typeface="Times New Roman" panose="02020603050405020304" pitchFamily="18" charset="0"/>
+                <a:cs typeface="Times New Roman" panose="02020603050405020304" pitchFamily="18" charset="0"/>
+              </a:rPr>
+              <a:t>amoCRM</a:t>
+            </a:r>
+            <a:r>
+              <a:rPr lang="ru-RU" sz="2000" dirty="0">
+                <a:effectLst/>
+                <a:latin typeface="Times New Roman" panose="02020603050405020304" pitchFamily="18" charset="0"/>
+                <a:cs typeface="Times New Roman" panose="02020603050405020304" pitchFamily="18" charset="0"/>
+              </a:rPr>
+              <a:t>, 1С:Управление нашей фирмой, </a:t>
+            </a:r>
+            <a:r>
+              <a:rPr lang="ru-RU" sz="2000" dirty="0" err="1">
+                <a:effectLst/>
+                <a:latin typeface="Times New Roman" panose="02020603050405020304" pitchFamily="18" charset="0"/>
+                <a:cs typeface="Times New Roman" panose="02020603050405020304" pitchFamily="18" charset="0"/>
+              </a:rPr>
+              <a:t>Trello</a:t>
+            </a:r>
+            <a:r>
+              <a:rPr lang="ru-RU" sz="2000" dirty="0">
+                <a:effectLst/>
+                <a:latin typeface="Times New Roman" panose="02020603050405020304" pitchFamily="18" charset="0"/>
+                <a:cs typeface="Times New Roman" panose="02020603050405020304" pitchFamily="18" charset="0"/>
+              </a:rPr>
+              <a:t> и </a:t>
+            </a:r>
+            <a:r>
+              <a:rPr lang="ru-RU" sz="2000" dirty="0" err="1">
+                <a:effectLst/>
+                <a:latin typeface="Times New Roman" panose="02020603050405020304" pitchFamily="18" charset="0"/>
+                <a:cs typeface="Times New Roman" panose="02020603050405020304" pitchFamily="18" charset="0"/>
+              </a:rPr>
+              <a:t>Asana</a:t>
+            </a:r>
+            <a:r>
+              <a:rPr lang="ru-RU" sz="2000" dirty="0">
+                <a:effectLst/>
+                <a:latin typeface="Times New Roman" panose="02020603050405020304" pitchFamily="18" charset="0"/>
+                <a:cs typeface="Times New Roman" panose="02020603050405020304" pitchFamily="18" charset="0"/>
+              </a:rPr>
+              <a:t>. Большинство аналогов имеют высокую стоимость</a:t>
+            </a:r>
+            <a:r>
+              <a:rPr lang="en-US" sz="2000" dirty="0">
+                <a:effectLst/>
+                <a:latin typeface="Times New Roman" panose="02020603050405020304" pitchFamily="18" charset="0"/>
+                <a:cs typeface="Times New Roman" panose="02020603050405020304" pitchFamily="18" charset="0"/>
+              </a:rPr>
+              <a:t> </a:t>
+            </a:r>
+            <a:r>
+              <a:rPr lang="ru-RU" sz="2000" dirty="0">
+                <a:latin typeface="Times New Roman" panose="02020603050405020304" pitchFamily="18" charset="0"/>
+                <a:cs typeface="Times New Roman" panose="02020603050405020304" pitchFamily="18" charset="0"/>
+              </a:rPr>
+              <a:t>приобретения или подписку</a:t>
+            </a:r>
+            <a:r>
+              <a:rPr lang="ru-RU" sz="2000" dirty="0">
+                <a:effectLst/>
+                <a:latin typeface="Times New Roman" panose="02020603050405020304" pitchFamily="18" charset="0"/>
+                <a:cs typeface="Times New Roman" panose="02020603050405020304" pitchFamily="18" charset="0"/>
+              </a:rPr>
+              <a:t>, зависят от интернет-соединения и сторонних серверов, избыточный функционал и отсутствие расчета стоимости заказов, скидок и надбавок.</a:t>
+            </a:r>
+          </a:p>
+          <a:p>
+            <a:pPr indent="540000" algn="just">
+              <a:lnSpc>
+                <a:spcPct val="120000"/>
+              </a:lnSpc>
+            </a:pPr>
+            <a:r>
+              <a:rPr lang="ru-RU" sz="2000" dirty="0">
+                <a:effectLst/>
+                <a:latin typeface="Times New Roman" panose="02020603050405020304" pitchFamily="18" charset="0"/>
+                <a:cs typeface="Times New Roman" panose="02020603050405020304" pitchFamily="18" charset="0"/>
+              </a:rPr>
+              <a:t>Преимущества разработанной АИС:</a:t>
+            </a:r>
+            <a:endParaRPr lang="en-US" sz="2000" dirty="0">
+              <a:effectLst/>
+              <a:latin typeface="Times New Roman" panose="02020603050405020304" pitchFamily="18" charset="0"/>
+              <a:cs typeface="Times New Roman" panose="02020603050405020304" pitchFamily="18" charset="0"/>
+            </a:endParaRPr>
+          </a:p>
+          <a:p>
+            <a:pPr marL="0" marR="0" lvl="0" indent="540000" algn="just" defTabSz="914400" rtl="0" eaLnBrk="0" fontAlgn="base" latinLnBrk="0" hangingPunct="0">
+              <a:lnSpc>
+                <a:spcPct val="120000"/>
+              </a:lnSpc>
+              <a:buClrTx/>
+              <a:buSzTx/>
+              <a:tabLst/>
+            </a:pPr>
+            <a:r>
+              <a:rPr lang="en-US" altLang="ru-RU" sz="2000" dirty="0">
+                <a:latin typeface="Times New Roman" panose="02020603050405020304" pitchFamily="18" charset="0"/>
+                <a:cs typeface="Times New Roman" panose="02020603050405020304" pitchFamily="18" charset="0"/>
+              </a:rPr>
+              <a:t>- </a:t>
+            </a:r>
+            <a:r>
+              <a:rPr lang="ru-RU" altLang="ru-RU" sz="2000" dirty="0">
+                <a:latin typeface="Times New Roman" panose="02020603050405020304" pitchFamily="18" charset="0"/>
+                <a:cs typeface="Times New Roman" panose="02020603050405020304" pitchFamily="18" charset="0"/>
+              </a:rPr>
+              <a:t>простой интерфейс, адаптированный под разработку web-сайтов;</a:t>
+            </a:r>
+          </a:p>
+          <a:p>
+            <a:pPr marL="0" marR="0" lvl="0" indent="540000" algn="just" defTabSz="914400" rtl="0" eaLnBrk="0" fontAlgn="base" latinLnBrk="0" hangingPunct="0">
+              <a:lnSpc>
+                <a:spcPct val="120000"/>
+              </a:lnSpc>
+              <a:buClrTx/>
+              <a:buSzTx/>
+              <a:tabLst/>
+            </a:pPr>
+            <a:r>
+              <a:rPr lang="en-US" altLang="ru-RU" sz="2000" dirty="0">
+                <a:latin typeface="Times New Roman" panose="02020603050405020304" pitchFamily="18" charset="0"/>
+                <a:cs typeface="Times New Roman" panose="02020603050405020304" pitchFamily="18" charset="0"/>
+              </a:rPr>
+              <a:t>- </a:t>
+            </a:r>
+            <a:r>
+              <a:rPr lang="ru-RU" altLang="ru-RU" sz="2000" dirty="0">
+                <a:latin typeface="Times New Roman" panose="02020603050405020304" pitchFamily="18" charset="0"/>
+                <a:cs typeface="Times New Roman" panose="02020603050405020304" pitchFamily="18" charset="0"/>
+              </a:rPr>
+              <a:t>разграничение прав доступа для администратора, менеджера и директора;</a:t>
+            </a:r>
+          </a:p>
+          <a:p>
+            <a:pPr marL="0" marR="0" lvl="0" indent="540000" algn="just" defTabSz="914400" rtl="0" eaLnBrk="0" fontAlgn="base" latinLnBrk="0" hangingPunct="0">
+              <a:lnSpc>
+                <a:spcPct val="120000"/>
+              </a:lnSpc>
+              <a:buClrTx/>
+              <a:buSzTx/>
+              <a:tabLst/>
+            </a:pPr>
+            <a:r>
+              <a:rPr lang="en-US" altLang="ru-RU" sz="2000" dirty="0">
+                <a:latin typeface="Times New Roman" panose="02020603050405020304" pitchFamily="18" charset="0"/>
+                <a:cs typeface="Times New Roman" panose="02020603050405020304" pitchFamily="18" charset="0"/>
+              </a:rPr>
+              <a:t>- </a:t>
+            </a:r>
+            <a:r>
+              <a:rPr lang="ru-RU" altLang="ru-RU" sz="2000" dirty="0">
+                <a:latin typeface="Times New Roman" panose="02020603050405020304" pitchFamily="18" charset="0"/>
+                <a:cs typeface="Times New Roman" panose="02020603050405020304" pitchFamily="18" charset="0"/>
+              </a:rPr>
+              <a:t>автоматический расчёт стоимости заказа;</a:t>
+            </a:r>
+          </a:p>
+          <a:p>
+            <a:pPr marL="0" marR="0" lvl="0" indent="540000" algn="just" defTabSz="914400" rtl="0" eaLnBrk="0" fontAlgn="base" latinLnBrk="0" hangingPunct="0">
+              <a:lnSpc>
+                <a:spcPct val="120000"/>
+              </a:lnSpc>
+              <a:buClrTx/>
+              <a:buSzTx/>
+              <a:tabLst/>
+            </a:pPr>
+            <a:r>
+              <a:rPr lang="en-US" altLang="ru-RU" sz="2000" dirty="0">
+                <a:latin typeface="Times New Roman" panose="02020603050405020304" pitchFamily="18" charset="0"/>
+                <a:cs typeface="Times New Roman" panose="02020603050405020304" pitchFamily="18" charset="0"/>
+              </a:rPr>
+              <a:t>- </a:t>
+            </a:r>
+            <a:r>
+              <a:rPr lang="ru-RU" altLang="ru-RU" sz="2000" dirty="0">
+                <a:latin typeface="Times New Roman" panose="02020603050405020304" pitchFamily="18" charset="0"/>
+                <a:cs typeface="Times New Roman" panose="02020603050405020304" pitchFamily="18" charset="0"/>
+              </a:rPr>
+              <a:t>формирование чеков и отчётов в MS Word, MS Excel или PDF;</a:t>
+            </a:r>
+          </a:p>
+          <a:p>
+            <a:pPr marL="0" marR="0" lvl="0" indent="540000" algn="just" defTabSz="914400" rtl="0" eaLnBrk="0" fontAlgn="base" latinLnBrk="0" hangingPunct="0">
+              <a:lnSpc>
+                <a:spcPct val="120000"/>
+              </a:lnSpc>
+              <a:buClrTx/>
+              <a:buSzTx/>
+              <a:tabLst/>
+            </a:pPr>
+            <a:r>
+              <a:rPr lang="en-US" altLang="ru-RU" sz="2000" dirty="0">
+                <a:latin typeface="Times New Roman" panose="02020603050405020304" pitchFamily="18" charset="0"/>
+                <a:cs typeface="Times New Roman" panose="02020603050405020304" pitchFamily="18" charset="0"/>
+              </a:rPr>
+              <a:t>- </a:t>
+            </a:r>
+            <a:r>
+              <a:rPr lang="ru-RU" altLang="ru-RU" sz="2000" dirty="0">
+                <a:latin typeface="Times New Roman" panose="02020603050405020304" pitchFamily="18" charset="0"/>
+                <a:cs typeface="Times New Roman" panose="02020603050405020304" pitchFamily="18" charset="0"/>
+              </a:rPr>
+              <a:t>резервное копирование и защита информации;</a:t>
+            </a:r>
+          </a:p>
+          <a:p>
+            <a:pPr marL="0" marR="0" lvl="0" indent="540000" algn="just" defTabSz="914400" rtl="0" eaLnBrk="0" fontAlgn="base" latinLnBrk="0" hangingPunct="0">
+              <a:lnSpc>
+                <a:spcPct val="120000"/>
+              </a:lnSpc>
+              <a:buClrTx/>
+              <a:buSzTx/>
+              <a:tabLst/>
+            </a:pPr>
+            <a:r>
+              <a:rPr lang="en-US" altLang="ru-RU" sz="2000" dirty="0">
+                <a:latin typeface="Times New Roman" panose="02020603050405020304" pitchFamily="18" charset="0"/>
+                <a:cs typeface="Times New Roman" panose="02020603050405020304" pitchFamily="18" charset="0"/>
+              </a:rPr>
+              <a:t>- </a:t>
+            </a:r>
+            <a:r>
+              <a:rPr lang="ru-RU" altLang="ru-RU" sz="2000" dirty="0">
+                <a:latin typeface="Times New Roman" panose="02020603050405020304" pitchFamily="18" charset="0"/>
+                <a:cs typeface="Times New Roman" panose="02020603050405020304" pitchFamily="18" charset="0"/>
+              </a:rPr>
+              <a:t>автономная работа без зависимости от сторонних сервисов.</a:t>
+            </a:r>
+            <a:endParaRPr lang="ru-RU" sz="2000" dirty="0">
+              <a:latin typeface="Times New Roman" panose="02020603050405020304" pitchFamily="18" charset="0"/>
+              <a:cs typeface="Times New Roman" panose="02020603050405020304" pitchFamily="18" charset="0"/>
+            </a:endParaRPr>
+          </a:p>
+          <a:p>
+            <a:pPr>
+              <a:lnSpc>
+                <a:spcPct val="120000"/>
+              </a:lnSpc>
+            </a:pPr>
+            <a:r>
+              <a:rPr lang="ru-RU" sz="2000" b="1" dirty="0">
+                <a:effectLst/>
+                <a:latin typeface="Times New Roman" panose="02020603050405020304" pitchFamily="18" charset="0"/>
+                <a:cs typeface="Times New Roman" panose="02020603050405020304" pitchFamily="18" charset="0"/>
+              </a:rPr>
+              <a:t>Цена разработки </a:t>
+            </a:r>
+            <a:r>
+              <a:rPr lang="ru-RU" sz="2000" dirty="0">
+                <a:effectLst/>
+                <a:latin typeface="Times New Roman" panose="02020603050405020304" pitchFamily="18" charset="0"/>
+                <a:cs typeface="Times New Roman" panose="02020603050405020304" pitchFamily="18" charset="0"/>
+              </a:rPr>
+              <a:t>– 27 433,12 руб.</a:t>
+            </a:r>
+          </a:p>
+          <a:p>
+            <a:pPr>
+              <a:lnSpc>
+                <a:spcPct val="120000"/>
+              </a:lnSpc>
+            </a:pPr>
+            <a:r>
+              <a:rPr lang="ru-RU" sz="2000" b="1" dirty="0">
+                <a:latin typeface="Times New Roman" panose="02020603050405020304" pitchFamily="18" charset="0"/>
+                <a:cs typeface="Times New Roman" panose="02020603050405020304" pitchFamily="18" charset="0"/>
+              </a:rPr>
+              <a:t>Отпускная цена одной копии </a:t>
+            </a:r>
+            <a:r>
+              <a:rPr lang="ru-RU" sz="2000" dirty="0">
+                <a:effectLst/>
+                <a:latin typeface="Times New Roman" panose="02020603050405020304" pitchFamily="18" charset="0"/>
+                <a:cs typeface="Times New Roman" panose="02020603050405020304" pitchFamily="18" charset="0"/>
+              </a:rPr>
+              <a:t>–</a:t>
+            </a:r>
+            <a:r>
+              <a:rPr lang="ru-RU" sz="2000" dirty="0">
+                <a:latin typeface="Times New Roman" panose="02020603050405020304" pitchFamily="18" charset="0"/>
+                <a:cs typeface="Times New Roman" panose="02020603050405020304" pitchFamily="18" charset="0"/>
+              </a:rPr>
+              <a:t> 200 руб.</a:t>
+            </a:r>
+            <a:br>
+              <a:rPr lang="ru-RU" sz="2000" dirty="0">
+                <a:effectLst/>
+                <a:latin typeface="Times New Roman" panose="02020603050405020304" pitchFamily="18" charset="0"/>
+                <a:cs typeface="Times New Roman" panose="02020603050405020304" pitchFamily="18" charset="0"/>
+              </a:rPr>
+            </a:br>
+            <a:r>
+              <a:rPr lang="ru-RU" sz="2000" b="1" dirty="0">
+                <a:effectLst/>
+                <a:latin typeface="Times New Roman" panose="02020603050405020304" pitchFamily="18" charset="0"/>
+                <a:cs typeface="Times New Roman" panose="02020603050405020304" pitchFamily="18" charset="0"/>
+              </a:rPr>
+              <a:t>Прогнозируемая выручка </a:t>
+            </a:r>
+            <a:r>
+              <a:rPr lang="ru-RU" sz="2000" dirty="0">
+                <a:effectLst/>
+                <a:latin typeface="Times New Roman" panose="02020603050405020304" pitchFamily="18" charset="0"/>
+                <a:cs typeface="Times New Roman" panose="02020603050405020304" pitchFamily="18" charset="0"/>
+              </a:rPr>
+              <a:t>– 35 400 руб./год.</a:t>
+            </a:r>
+            <a:br>
+              <a:rPr lang="ru-RU" sz="2000" dirty="0">
+                <a:effectLst/>
+                <a:latin typeface="Times New Roman" panose="02020603050405020304" pitchFamily="18" charset="0"/>
+                <a:cs typeface="Times New Roman" panose="02020603050405020304" pitchFamily="18" charset="0"/>
+              </a:rPr>
+            </a:br>
+            <a:r>
+              <a:rPr lang="ru-RU" sz="2000" b="1" dirty="0">
+                <a:effectLst/>
+                <a:latin typeface="Times New Roman" panose="02020603050405020304" pitchFamily="18" charset="0"/>
+                <a:cs typeface="Times New Roman" panose="02020603050405020304" pitchFamily="18" charset="0"/>
+              </a:rPr>
+              <a:t>Срок окупаемости </a:t>
+            </a:r>
+            <a:r>
+              <a:rPr lang="ru-RU" sz="2000" dirty="0">
+                <a:effectLst/>
+                <a:latin typeface="Times New Roman" panose="02020603050405020304" pitchFamily="18" charset="0"/>
+                <a:cs typeface="Times New Roman" panose="02020603050405020304" pitchFamily="18" charset="0"/>
+              </a:rPr>
+              <a:t>– около 11 месяцев.</a:t>
+            </a:r>
+          </a:p>
+          <a:p>
+            <a:pPr indent="540000" algn="just">
+              <a:lnSpc>
+                <a:spcPct val="120000"/>
+              </a:lnSpc>
+            </a:pPr>
+            <a:endParaRPr lang="ru-RU" sz="2000" dirty="0">
+              <a:latin typeface="Times New Roman" panose="02020603050405020304" pitchFamily="18" charset="0"/>
+              <a:cs typeface="Times New Roman" panose="02020603050405020304" pitchFamily="18" charset="0"/>
+            </a:endParaRPr>
+          </a:p>
+        </p:txBody>
+      </p:sp>
+    </p:spTree>
+    <p:extLst>
+      <p:ext uri="{BB962C8B-B14F-4D97-AF65-F5344CB8AC3E}">
+        <p14:creationId xmlns:p14="http://schemas.microsoft.com/office/powerpoint/2010/main" val="399859881"/>
+      </p:ext>
+    </p:extLst>
+  </p:cSld>
+  <p:clrMapOvr>
+    <a:masterClrMapping/>
+  </p:clrMapOvr>
+</p:sld>
+</file>
+
+<file path=ppt/slides/slide2.xml><?xml version="1.0" encoding="utf-8"?>
+<p:sld xmlns:a="http://schemas.openxmlformats.org/drawingml/2006/main" xmlns:r="http://schemas.openxmlformats.org/officeDocument/2006/relationships" xmlns:p="http://schemas.openxmlformats.org/presentationml/2006/main">
+  <p:cSld>
+    <p:spTree>
+      <p:nvGrpSpPr>
+        <p:cNvPr id="1" name=""/>
+        <p:cNvGrpSpPr/>
+        <p:nvPr/>
+      </p:nvGrpSpPr>
+      <p:grpSpPr>
+        <a:xfrm>
+          <a:off x="0" y="0"/>
+          <a:ext cx="0" cy="0"/>
+          <a:chOff x="0" y="0"/>
+          <a:chExt cx="0" cy="0"/>
+        </a:xfrm>
+      </p:grpSpPr>
+      <p:sp>
+        <p:nvSpPr>
+          <p:cNvPr id="2" name="Заголовок 1"/>
+          <p:cNvSpPr>
+            <a:spLocks noGrp="1"/>
+          </p:cNvSpPr>
+          <p:nvPr>
+            <p:ph type="title"/>
+          </p:nvPr>
+        </p:nvSpPr>
+        <p:spPr>
+          <a:xfrm>
+            <a:off x="0" y="450850"/>
+            <a:ext cx="12192000" cy="758825"/>
+          </a:xfrm>
+          <a:solidFill>
+            <a:srgbClr val="00B0F0"/>
+          </a:solidFill>
+          <a:ln>
+            <a:solidFill>
+              <a:srgbClr val="00B0F0"/>
+            </a:solidFill>
+          </a:ln>
+        </p:spPr>
+        <p:txBody>
+          <a:bodyPr>
+            <a:normAutofit/>
+          </a:bodyPr>
+          <a:lstStyle/>
+          <a:p>
+            <a:pPr algn="ctr"/>
+            <a:r>
+              <a:rPr lang="ru-RU" sz="4000" dirty="0">
+                <a:solidFill>
+                  <a:schemeClr val="bg1"/>
+                </a:solidFill>
+                <a:latin typeface="Corbel (Заголовки)"/>
+              </a:rPr>
+              <a:t>Актуальность темы</a:t>
+            </a:r>
+          </a:p>
+        </p:txBody>
+      </p:sp>
+      <p:sp>
+        <p:nvSpPr>
+          <p:cNvPr id="3" name="Объект 2"/>
+          <p:cNvSpPr>
+            <a:spLocks noGrp="1"/>
+          </p:cNvSpPr>
+          <p:nvPr>
+            <p:ph idx="1"/>
+          </p:nvPr>
+        </p:nvSpPr>
+        <p:spPr>
+          <a:xfrm>
+            <a:off x="853440" y="1306286"/>
+            <a:ext cx="10511246" cy="5486400"/>
+          </a:xfrm>
+        </p:spPr>
+        <p:txBody>
+          <a:bodyPr anchor="t">
+            <a:noAutofit/>
+          </a:bodyPr>
+          <a:lstStyle/>
+          <a:p>
+            <a:pPr marL="0" indent="540000" algn="just">
+              <a:lnSpc>
+                <a:spcPct val="150000"/>
+              </a:lnSpc>
+              <a:spcBef>
+                <a:spcPts val="0"/>
+              </a:spcBef>
+              <a:buNone/>
+            </a:pPr>
+            <a:r>
+              <a:rPr lang="ru-RU" sz="2000" dirty="0">
+                <a:latin typeface="Times New Roman" panose="02020603050405020304" pitchFamily="18" charset="0"/>
+                <a:cs typeface="Times New Roman" panose="02020603050405020304" pitchFamily="18" charset="0"/>
+              </a:rPr>
+              <a:t>В настоящее время информационные технологии играют ключевую роль в деятельности организаций, оказывающих услуги по разработке web-сайтов, и стали необходимым условием их конкурентоспособности. С ростом спроса на качественные web-решения увеличивается число клиентов и объём поступающих заказов, в связи с чем эффективность работы компаний напрямую зависит от скорости обработки заявок, контроля сроков выполнения проектов и учёта стоимости услуг.</a:t>
+            </a:r>
+          </a:p>
+          <a:p>
+            <a:pPr marL="0" indent="540000" algn="just">
+              <a:lnSpc>
+                <a:spcPct val="150000"/>
+              </a:lnSpc>
+              <a:spcBef>
+                <a:spcPts val="0"/>
+              </a:spcBef>
+              <a:buNone/>
+            </a:pPr>
+            <a:r>
+              <a:rPr lang="ru-RU" sz="2000" dirty="0">
+                <a:latin typeface="Times New Roman" panose="02020603050405020304" pitchFamily="18" charset="0"/>
+                <a:cs typeface="Times New Roman" panose="02020603050405020304" pitchFamily="18" charset="0"/>
+              </a:rPr>
+              <a:t>Актуальность темы обусловлена необходимостью создания эффективных инструментов для управления рабочим процессом и заявками в сфере разработки web-сайтов, что позволит повысить качество обслуживания и сократить временные затраты на выполнение задач.</a:t>
+            </a:r>
+          </a:p>
+        </p:txBody>
+      </p:sp>
+    </p:spTree>
+    <p:extLst>
+      <p:ext uri="{BB962C8B-B14F-4D97-AF65-F5344CB8AC3E}">
+        <p14:creationId xmlns:p14="http://schemas.microsoft.com/office/powerpoint/2010/main" val="3950111895"/>
+      </p:ext>
+    </p:extLst>
+  </p:cSld>
+  <p:clrMapOvr>
+    <a:masterClrMapping/>
+  </p:clrMapOvr>
+</p:sld>
+</file>
+
+<file path=ppt/slides/slide20.xml><?xml version="1.0" encoding="utf-8"?>
+<p:sld xmlns:a="http://schemas.openxmlformats.org/drawingml/2006/main" xmlns:r="http://schemas.openxmlformats.org/officeDocument/2006/relationships" xmlns:p="http://schemas.openxmlformats.org/presentationml/2006/main">
+  <p:cSld>
+    <p:spTree>
+      <p:nvGrpSpPr>
+        <p:cNvPr id="1" name=""/>
+        <p:cNvGrpSpPr/>
+        <p:nvPr/>
+      </p:nvGrpSpPr>
+      <p:grpSpPr>
+        <a:xfrm>
+          <a:off x="0" y="0"/>
+          <a:ext cx="0" cy="0"/>
+          <a:chOff x="0" y="0"/>
+          <a:chExt cx="0" cy="0"/>
+        </a:xfrm>
+      </p:grpSpPr>
+      <p:sp>
+        <p:nvSpPr>
+          <p:cNvPr id="2" name="Прямоугольник 1"/>
+          <p:cNvSpPr/>
+          <p:nvPr/>
+        </p:nvSpPr>
+        <p:spPr>
+          <a:xfrm>
+            <a:off x="742950" y="1257941"/>
+            <a:ext cx="10987496" cy="5600059"/>
+          </a:xfrm>
+          <a:prstGeom prst="rect">
+            <a:avLst/>
+          </a:prstGeom>
+        </p:spPr>
+        <p:txBody>
+          <a:bodyPr wrap="square" anchor="ctr">
+            <a:spAutoFit/>
+          </a:bodyPr>
+          <a:lstStyle/>
+          <a:p>
+            <a:pPr indent="540000">
+              <a:lnSpc>
+                <a:spcPct val="120000"/>
+              </a:lnSpc>
+            </a:pPr>
+            <a:r>
+              <a:rPr lang="ru-RU" sz="2000" dirty="0">
+                <a:effectLst/>
+                <a:latin typeface="Times New Roman" panose="02020603050405020304" pitchFamily="18" charset="0"/>
+                <a:cs typeface="Times New Roman" panose="02020603050405020304" pitchFamily="18" charset="0"/>
+              </a:rPr>
+              <a:t>В ходе выполнения выпускной квалификационной работы была разработана автоматизированная информационная система по ведению базы данных разработки web-сайтов на базе платформы .NET.</a:t>
+            </a:r>
+          </a:p>
+          <a:p>
+            <a:pPr indent="540000">
+              <a:lnSpc>
+                <a:spcPct val="120000"/>
+              </a:lnSpc>
+            </a:pPr>
+            <a:r>
+              <a:rPr lang="ru-RU" sz="2000" dirty="0">
+                <a:latin typeface="Times New Roman" panose="02020603050405020304" pitchFamily="18" charset="0"/>
+              </a:rPr>
+              <a:t>В процессе написания программного кода использовался высокоуровневый язык программирования </a:t>
+            </a:r>
+            <a:r>
+              <a:rPr lang="en-US" sz="2000" dirty="0">
+                <a:latin typeface="Times New Roman" panose="02020603050405020304" pitchFamily="18" charset="0"/>
+              </a:rPr>
+              <a:t>C#</a:t>
+            </a:r>
+            <a:r>
+              <a:rPr lang="ru-RU" sz="2000" dirty="0">
+                <a:latin typeface="Times New Roman" panose="02020603050405020304" pitchFamily="18" charset="0"/>
+              </a:rPr>
+              <a:t>. Были улучшены навыки по работе с платформой .NET. </a:t>
+            </a:r>
+            <a:endParaRPr lang="ru-RU" sz="2000" dirty="0">
+              <a:effectLst/>
+              <a:latin typeface="Times New Roman" panose="02020603050405020304" pitchFamily="18" charset="0"/>
+              <a:cs typeface="Times New Roman" panose="02020603050405020304" pitchFamily="18" charset="0"/>
+            </a:endParaRPr>
+          </a:p>
+          <a:p>
+            <a:pPr indent="540000">
+              <a:lnSpc>
+                <a:spcPct val="120000"/>
+              </a:lnSpc>
+            </a:pPr>
+            <a:r>
+              <a:rPr lang="ru-RU" sz="2000" dirty="0">
+                <a:effectLst/>
+                <a:latin typeface="Times New Roman" panose="02020603050405020304" pitchFamily="18" charset="0"/>
+                <a:cs typeface="Times New Roman" panose="02020603050405020304" pitchFamily="18" charset="0"/>
+              </a:rPr>
+              <a:t>Разработанная система полностью соответствует поставленным задачам и позволяет автоматизировать учёт клиентов, услуг и заказов, оформление заказов, расчёт стоимости, контроль сроков выполнения, формирование чеков и отчётов.</a:t>
+            </a:r>
+          </a:p>
+          <a:p>
+            <a:pPr indent="540000">
+              <a:lnSpc>
+                <a:spcPct val="120000"/>
+              </a:lnSpc>
+            </a:pPr>
+            <a:r>
+              <a:rPr lang="ru-RU" sz="2000" dirty="0">
+                <a:effectLst/>
+                <a:latin typeface="Times New Roman" panose="02020603050405020304" pitchFamily="18" charset="0"/>
+                <a:cs typeface="Times New Roman" panose="02020603050405020304" pitchFamily="18" charset="0"/>
+              </a:rPr>
+              <a:t>В программе реализовано разграничение прав доступа для трёх ролей, поиск, сортировка и фильтрация данных, резервное копирование и восстановление базы данных, импорт и экспорт данных, CAPTCHA при авторизации, пагинация, защита персональных данных и автоматическая блокировка системы при отсутствии активности пользователя.</a:t>
+            </a:r>
+          </a:p>
+          <a:p>
+            <a:pPr indent="540000">
+              <a:lnSpc>
+                <a:spcPct val="120000"/>
+              </a:lnSpc>
+            </a:pPr>
+            <a:r>
+              <a:rPr lang="ru-RU" sz="2000" dirty="0">
+                <a:effectLst/>
+                <a:latin typeface="Times New Roman" panose="02020603050405020304" pitchFamily="18" charset="0"/>
+                <a:cs typeface="Times New Roman" panose="02020603050405020304" pitchFamily="18" charset="0"/>
+              </a:rPr>
+              <a:t>В дальнейшем программный продукт может быть усовершенствован путём доработки интерфейса, расширения функционала отчётов и адаптации системы под требования конкретных организаций, занимающихся разработкой web-сайтов.</a:t>
+            </a:r>
+          </a:p>
+        </p:txBody>
+      </p:sp>
+      <p:sp>
+        <p:nvSpPr>
+          <p:cNvPr id="3" name="Заголовок 1"/>
+          <p:cNvSpPr txBox="1">
+            <a:spLocks/>
+          </p:cNvSpPr>
+          <p:nvPr/>
+        </p:nvSpPr>
+        <p:spPr>
+          <a:xfrm>
+            <a:off x="0" y="450850"/>
+            <a:ext cx="12192000" cy="758825"/>
+          </a:xfrm>
+          <a:prstGeom prst="rect">
+            <a:avLst/>
+          </a:prstGeom>
+          <a:solidFill>
+            <a:srgbClr val="00B0F0"/>
+          </a:solidFill>
+          <a:ln>
+            <a:solidFill>
+              <a:srgbClr val="00B0F0"/>
+            </a:solidFill>
+          </a:ln>
+        </p:spPr>
+        <p:txBody>
+          <a:bodyPr anchor="ctr">
+            <a:normAutofit/>
+          </a:bodyPr>
+          <a:lstStyle>
+            <a:lvl1pPr algn="l" defTabSz="914400" rtl="0" eaLnBrk="1" latinLnBrk="0" hangingPunct="1">
+              <a:lnSpc>
+                <a:spcPct val="90000"/>
+              </a:lnSpc>
+              <a:spcBef>
+                <a:spcPct val="0"/>
+              </a:spcBef>
+              <a:buNone/>
+              <a:defRPr sz="4400" kern="1200">
+                <a:solidFill>
+                  <a:schemeClr val="tx1"/>
+                </a:solidFill>
+                <a:latin typeface="+mj-lt"/>
+                <a:ea typeface="+mj-ea"/>
+                <a:cs typeface="+mj-cs"/>
+              </a:defRPr>
+            </a:lvl1pPr>
+          </a:lstStyle>
+          <a:p>
+            <a:pPr algn="ctr"/>
+            <a:r>
+              <a:rPr lang="ru-RU" sz="4000" dirty="0">
+                <a:solidFill>
+                  <a:schemeClr val="bg1"/>
+                </a:solidFill>
+                <a:latin typeface="Corbel (Заголовки)"/>
+              </a:rPr>
               <a:t>Заключение</a:t>
             </a:r>
           </a:p>
@@ -6307,7 +6846,7 @@
 </p:sld>
 </file>
 
-<file path=ppt/slides/slide19.xml><?xml version="1.0" encoding="utf-8"?>
+<file path=ppt/slides/slide21.xml><?xml version="1.0" encoding="utf-8"?>
 <p:sld xmlns:a="http://schemas.openxmlformats.org/drawingml/2006/main" xmlns:r="http://schemas.openxmlformats.org/officeDocument/2006/relationships" xmlns:p="http://schemas.openxmlformats.org/presentationml/2006/main">
   <p:cSld>
     <p:spTree>
@@ -6817,138 +7356,6 @@
 </p:sld>
 </file>
 
-<file path=ppt/slides/slide2.xml><?xml version="1.0" encoding="utf-8"?>
-<p:sld xmlns:a="http://schemas.openxmlformats.org/drawingml/2006/main" xmlns:r="http://schemas.openxmlformats.org/officeDocument/2006/relationships" xmlns:p="http://schemas.openxmlformats.org/presentationml/2006/main">
-  <p:cSld>
-    <p:spTree>
-      <p:nvGrpSpPr>
-        <p:cNvPr id="1" name=""/>
-        <p:cNvGrpSpPr/>
-        <p:nvPr/>
-      </p:nvGrpSpPr>
-      <p:grpSpPr>
-        <a:xfrm>
-          <a:off x="0" y="0"/>
-          <a:ext cx="0" cy="0"/>
-          <a:chOff x="0" y="0"/>
-          <a:chExt cx="0" cy="0"/>
-        </a:xfrm>
-      </p:grpSpPr>
-      <p:sp>
-        <p:nvSpPr>
-          <p:cNvPr id="2" name="Заголовок 1"/>
-          <p:cNvSpPr>
-            <a:spLocks noGrp="1"/>
-          </p:cNvSpPr>
-          <p:nvPr>
-            <p:ph type="title"/>
-          </p:nvPr>
-        </p:nvSpPr>
-        <p:spPr>
-          <a:xfrm>
-            <a:off x="0" y="450850"/>
-            <a:ext cx="12192000" cy="758825"/>
-          </a:xfrm>
-          <a:solidFill>
-            <a:srgbClr val="00B0F0"/>
-          </a:solidFill>
-          <a:ln>
-            <a:solidFill>
-              <a:srgbClr val="00B0F0"/>
-            </a:solidFill>
-          </a:ln>
-        </p:spPr>
-        <p:txBody>
-          <a:bodyPr>
-            <a:normAutofit/>
-          </a:bodyPr>
-          <a:lstStyle/>
-          <a:p>
-            <a:pPr algn="ctr"/>
-            <a:r>
-              <a:rPr lang="ru-RU" sz="4000" dirty="0">
-                <a:solidFill>
-                  <a:schemeClr val="bg1"/>
-                </a:solidFill>
-                <a:latin typeface="Corbel (Заголовки)"/>
-              </a:rPr>
-              <a:t>Актуальность темы</a:t>
-            </a:r>
-          </a:p>
-        </p:txBody>
-      </p:sp>
-      <p:sp>
-        <p:nvSpPr>
-          <p:cNvPr id="3" name="Объект 2"/>
-          <p:cNvSpPr>
-            <a:spLocks noGrp="1"/>
-          </p:cNvSpPr>
-          <p:nvPr>
-            <p:ph idx="1"/>
-          </p:nvPr>
-        </p:nvSpPr>
-        <p:spPr>
-          <a:xfrm>
-            <a:off x="853440" y="1306286"/>
-            <a:ext cx="10511246" cy="5486400"/>
-          </a:xfrm>
-        </p:spPr>
-        <p:txBody>
-          <a:bodyPr anchor="t">
-            <a:noAutofit/>
-          </a:bodyPr>
-          <a:lstStyle/>
-          <a:p>
-            <a:pPr marL="0" indent="540000" algn="just">
-              <a:lnSpc>
-                <a:spcPct val="150000"/>
-              </a:lnSpc>
-              <a:spcBef>
-                <a:spcPts val="0"/>
-              </a:spcBef>
-              <a:buNone/>
-            </a:pPr>
-            <a:r>
-              <a:rPr lang="ru-RU" sz="2000" dirty="0">
-                <a:latin typeface="Times New Roman" panose="02020603050405020304" pitchFamily="18" charset="0"/>
-                <a:cs typeface="Times New Roman" panose="02020603050405020304" pitchFamily="18" charset="0"/>
-              </a:rPr>
-              <a:t>В настоящее время информационные технологии играют ключевую роль в деятельности организаций, оказывающих услуги по разработке web-сайтов, и стали необходимым условием их конкурентоспособности. С ростом спроса на качественные web-решения увеличивается число клиентов и объём поступающих заказов, в связи с чем эффективность работы компаний напрямую зависит от скорости обработки заявок, контроля сроков выполнения проектов и учёта стоимости услуг.</a:t>
-            </a:r>
-          </a:p>
-          <a:p>
-            <a:pPr marL="0" indent="540000" algn="just">
-              <a:lnSpc>
-                <a:spcPct val="150000"/>
-              </a:lnSpc>
-              <a:spcBef>
-                <a:spcPts val="0"/>
-              </a:spcBef>
-              <a:buNone/>
-            </a:pPr>
-            <a:r>
-              <a:rPr lang="ru-RU" sz="2000" dirty="0">
-                <a:latin typeface="Times New Roman" panose="02020603050405020304" pitchFamily="18" charset="0"/>
-                <a:cs typeface="Times New Roman" panose="02020603050405020304" pitchFamily="18" charset="0"/>
-              </a:rPr>
-              <a:t>Актуальность темы обусловлена необходимостью создания эффективных инструментов для управления рабочим процессом и заявками в сфере разработки web-сайтов, что позволит повысить качество обслуживания и сократить временные затраты на выполнение задач.</a:t>
-            </a:r>
-          </a:p>
-        </p:txBody>
-      </p:sp>
-    </p:spTree>
-    <p:extLst>
-      <p:ext uri="{BB962C8B-B14F-4D97-AF65-F5344CB8AC3E}">
-        <p14:creationId xmlns:p14="http://schemas.microsoft.com/office/powerpoint/2010/main" val="3950111895"/>
-      </p:ext>
-    </p:extLst>
-  </p:cSld>
-  <p:clrMapOvr>
-    <a:masterClrMapping/>
-  </p:clrMapOvr>
-</p:sld>
-</file>
-
 <file path=ppt/slides/slide3.xml><?xml version="1.0" encoding="utf-8"?>
 <p:sld xmlns:a="http://schemas.openxmlformats.org/drawingml/2006/main" xmlns:r="http://schemas.openxmlformats.org/officeDocument/2006/relationships" xmlns:p="http://schemas.openxmlformats.org/presentationml/2006/main">
   <p:cSld>
@@ -8003,7 +8410,7 @@
                 </a:solidFill>
                 <a:latin typeface="Corbel (Заголовки)"/>
               </a:rPr>
-              <a:t>Программные модули</a:t>
+              <a:t>Диаграмма вариантов использования</a:t>
             </a:r>
           </a:p>
         </p:txBody>
@@ -8013,95 +8420,44 @@
           <p:cNvPr id="5" name="Рисунок 4">
             <a:extLst>
               <a:ext uri="{FF2B5EF4-FFF2-40B4-BE49-F238E27FC236}">
-                <a16:creationId xmlns:a16="http://schemas.microsoft.com/office/drawing/2014/main" id="{1767A4A0-3DFB-42D5-8EF9-6BED6F16887C}"/>
+                <a16:creationId xmlns:a16="http://schemas.microsoft.com/office/drawing/2014/main" id="{7A44BB36-B65A-4465-A0EC-339FD6F99971}"/>
               </a:ext>
             </a:extLst>
           </p:cNvPr>
-          <p:cNvPicPr>
-            <a:picLocks noChangeAspect="1"/>
-          </p:cNvPicPr>
+          <p:cNvPicPr/>
           <p:nvPr/>
         </p:nvPicPr>
         <p:blipFill>
-          <a:blip r:embed="rId2"/>
+          <a:blip r:embed="rId2">
+            <a:extLst>
+              <a:ext uri="{28A0092B-C50C-407E-A947-70E740481C1C}">
+                <a14:useLocalDpi xmlns:a14="http://schemas.microsoft.com/office/drawing/2010/main" val="0"/>
+              </a:ext>
+            </a:extLst>
+          </a:blip>
+          <a:srcRect/>
           <a:stretch>
             <a:fillRect/>
           </a:stretch>
         </p:blipFill>
-        <p:spPr>
-          <a:xfrm>
-            <a:off x="175399" y="1305469"/>
-            <a:ext cx="4030842" cy="3519080"/>
+        <p:spPr bwMode="auto">
+          <a:xfrm>
+            <a:off x="2667000" y="1479232"/>
+            <a:ext cx="6858000" cy="4927918"/>
           </a:xfrm>
           <a:prstGeom prst="rect">
             <a:avLst/>
           </a:prstGeom>
-        </p:spPr>
-      </p:pic>
-      <p:pic>
-        <p:nvPicPr>
-          <p:cNvPr id="7" name="Рисунок 6">
-            <a:extLst>
-              <a:ext uri="{FF2B5EF4-FFF2-40B4-BE49-F238E27FC236}">
-                <a16:creationId xmlns:a16="http://schemas.microsoft.com/office/drawing/2014/main" id="{9D87A916-70DA-4BBF-A7A3-20554A732D07}"/>
-              </a:ext>
-            </a:extLst>
-          </p:cNvPr>
-          <p:cNvPicPr>
-            <a:picLocks noChangeAspect="1"/>
-          </p:cNvPicPr>
-          <p:nvPr/>
-        </p:nvPicPr>
-        <p:blipFill>
-          <a:blip r:embed="rId3"/>
-          <a:stretch>
-            <a:fillRect/>
-          </a:stretch>
-        </p:blipFill>
-        <p:spPr>
-          <a:xfrm>
-            <a:off x="9212522" y="1305469"/>
-            <a:ext cx="2811000" cy="4769728"/>
-          </a:xfrm>
-          <a:prstGeom prst="rect">
-            <a:avLst/>
-          </a:prstGeom>
-        </p:spPr>
-      </p:pic>
-      <p:pic>
-        <p:nvPicPr>
-          <p:cNvPr id="9" name="Рисунок 8">
-            <a:extLst>
-              <a:ext uri="{FF2B5EF4-FFF2-40B4-BE49-F238E27FC236}">
-                <a16:creationId xmlns:a16="http://schemas.microsoft.com/office/drawing/2014/main" id="{3D4AC6E8-37B8-4289-A90A-3A4D00E14F17}"/>
-              </a:ext>
-            </a:extLst>
-          </p:cNvPr>
-          <p:cNvPicPr>
-            <a:picLocks noChangeAspect="1"/>
-          </p:cNvPicPr>
-          <p:nvPr/>
-        </p:nvPicPr>
-        <p:blipFill>
-          <a:blip r:embed="rId4"/>
-          <a:stretch>
-            <a:fillRect/>
-          </a:stretch>
-        </p:blipFill>
-        <p:spPr>
-          <a:xfrm>
-            <a:off x="4447107" y="1305469"/>
-            <a:ext cx="4524549" cy="3770457"/>
-          </a:xfrm>
-          <a:prstGeom prst="rect">
-            <a:avLst/>
-          </a:prstGeom>
+          <a:noFill/>
+          <a:ln>
+            <a:noFill/>
+          </a:ln>
         </p:spPr>
       </p:pic>
     </p:spTree>
     <p:extLst>
       <p:ext uri="{BB962C8B-B14F-4D97-AF65-F5344CB8AC3E}">
-        <p14:creationId xmlns:p14="http://schemas.microsoft.com/office/powerpoint/2010/main" val="3585857828"/>
+        <p14:creationId xmlns:p14="http://schemas.microsoft.com/office/powerpoint/2010/main" val="2805628280"/>
       </p:ext>
     </p:extLst>
   </p:cSld>
@@ -8166,7 +8522,7 @@
                 </a:solidFill>
                 <a:latin typeface="Corbel (Заголовки)"/>
               </a:rPr>
-              <a:t>Программные модули</a:t>
+              <a:t>Диаграмма деятельности</a:t>
             </a:r>
           </a:p>
         </p:txBody>
@@ -8176,95 +8532,44 @@
           <p:cNvPr id="5" name="Рисунок 4">
             <a:extLst>
               <a:ext uri="{FF2B5EF4-FFF2-40B4-BE49-F238E27FC236}">
-                <a16:creationId xmlns:a16="http://schemas.microsoft.com/office/drawing/2014/main" id="{80CFC79D-18B0-4DBD-92EB-C8BD01296CFB}"/>
+                <a16:creationId xmlns:a16="http://schemas.microsoft.com/office/drawing/2014/main" id="{A2EBBB43-20A4-4840-BD58-9168AC536688}"/>
               </a:ext>
             </a:extLst>
           </p:cNvPr>
-          <p:cNvPicPr>
-            <a:picLocks noChangeAspect="1"/>
-          </p:cNvPicPr>
+          <p:cNvPicPr/>
           <p:nvPr/>
         </p:nvPicPr>
         <p:blipFill>
-          <a:blip r:embed="rId2"/>
+          <a:blip r:embed="rId2" cstate="print">
+            <a:extLst>
+              <a:ext uri="{28A0092B-C50C-407E-A947-70E740481C1C}">
+                <a14:useLocalDpi xmlns:a14="http://schemas.microsoft.com/office/drawing/2010/main" val="0"/>
+              </a:ext>
+            </a:extLst>
+          </a:blip>
+          <a:srcRect/>
           <a:stretch>
             <a:fillRect/>
           </a:stretch>
         </p:blipFill>
-        <p:spPr>
-          <a:xfrm>
-            <a:off x="205832" y="1336765"/>
-            <a:ext cx="3755434" cy="4053841"/>
+        <p:spPr bwMode="auto">
+          <a:xfrm>
+            <a:off x="2006601" y="1310217"/>
+            <a:ext cx="8178799" cy="5336116"/>
           </a:xfrm>
           <a:prstGeom prst="rect">
             <a:avLst/>
           </a:prstGeom>
-        </p:spPr>
-      </p:pic>
-      <p:pic>
-        <p:nvPicPr>
-          <p:cNvPr id="8" name="Рисунок 7">
-            <a:extLst>
-              <a:ext uri="{FF2B5EF4-FFF2-40B4-BE49-F238E27FC236}">
-                <a16:creationId xmlns:a16="http://schemas.microsoft.com/office/drawing/2014/main" id="{D68AC8A0-BDF6-47CC-9BCB-599A6161E6DC}"/>
-              </a:ext>
-            </a:extLst>
-          </p:cNvPr>
-          <p:cNvPicPr>
-            <a:picLocks noChangeAspect="1"/>
-          </p:cNvPicPr>
-          <p:nvPr/>
-        </p:nvPicPr>
-        <p:blipFill>
-          <a:blip r:embed="rId3"/>
-          <a:stretch>
-            <a:fillRect/>
-          </a:stretch>
-        </p:blipFill>
-        <p:spPr>
-          <a:xfrm>
-            <a:off x="8287206" y="1336765"/>
-            <a:ext cx="3698961" cy="3992881"/>
-          </a:xfrm>
-          <a:prstGeom prst="rect">
-            <a:avLst/>
-          </a:prstGeom>
-        </p:spPr>
-      </p:pic>
-      <p:pic>
-        <p:nvPicPr>
-          <p:cNvPr id="12" name="Рисунок 11">
-            <a:extLst>
-              <a:ext uri="{FF2B5EF4-FFF2-40B4-BE49-F238E27FC236}">
-                <a16:creationId xmlns:a16="http://schemas.microsoft.com/office/drawing/2014/main" id="{1A98C191-1BC0-4DBF-9EAB-DA904896AF4C}"/>
-              </a:ext>
-            </a:extLst>
-          </p:cNvPr>
-          <p:cNvPicPr>
-            <a:picLocks noChangeAspect="1"/>
-          </p:cNvPicPr>
-          <p:nvPr/>
-        </p:nvPicPr>
-        <p:blipFill>
-          <a:blip r:embed="rId4"/>
-          <a:stretch>
-            <a:fillRect/>
-          </a:stretch>
-        </p:blipFill>
-        <p:spPr>
-          <a:xfrm>
-            <a:off x="4082279" y="1336765"/>
-            <a:ext cx="4093527" cy="3261361"/>
-          </a:xfrm>
-          <a:prstGeom prst="rect">
-            <a:avLst/>
-          </a:prstGeom>
+          <a:noFill/>
+          <a:ln>
+            <a:noFill/>
+          </a:ln>
         </p:spPr>
       </p:pic>
     </p:spTree>
     <p:extLst>
       <p:ext uri="{BB962C8B-B14F-4D97-AF65-F5344CB8AC3E}">
-        <p14:creationId xmlns:p14="http://schemas.microsoft.com/office/powerpoint/2010/main" val="1288615869"/>
+        <p14:creationId xmlns:p14="http://schemas.microsoft.com/office/powerpoint/2010/main" val="1121482898"/>
       </p:ext>
     </p:extLst>
   </p:cSld>
@@ -8293,20 +8598,19 @@
       </p:grpSpPr>
       <p:sp>
         <p:nvSpPr>
-          <p:cNvPr id="2" name="Заголовок 1"/>
-          <p:cNvSpPr txBox="1">
-            <a:spLocks/>
+          <p:cNvPr id="4" name="Заголовок 1"/>
+          <p:cNvSpPr>
+            <a:spLocks noGrp="1"/>
           </p:cNvSpPr>
-          <p:nvPr/>
+          <p:nvPr>
+            <p:ph type="title"/>
+          </p:nvPr>
         </p:nvSpPr>
         <p:spPr>
           <a:xfrm>
             <a:off x="0" y="450850"/>
             <a:ext cx="12192000" cy="758825"/>
           </a:xfrm>
-          <a:prstGeom prst="rect">
-            <a:avLst/>
-          </a:prstGeom>
           <a:solidFill>
             <a:srgbClr val="00B0F0"/>
           </a:solidFill>
@@ -8317,28 +8621,10 @@
           </a:ln>
         </p:spPr>
         <p:txBody>
-          <a:bodyPr anchor="ctr">
+          <a:bodyPr>
             <a:normAutofit/>
           </a:bodyPr>
-          <a:lstStyle>
-            <a:lvl1pPr algn="l" defTabSz="914400" rtl="0" eaLnBrk="1" latinLnBrk="0" hangingPunct="1">
-              <a:lnSpc>
-                <a:spcPct val="90000"/>
-              </a:lnSpc>
-              <a:spcBef>
-                <a:spcPct val="0"/>
-              </a:spcBef>
-              <a:buNone/>
-              <a:defRPr sz="4400" kern="1200">
-                <a:solidFill>
-                  <a:schemeClr val="tx1"/>
-                </a:solidFill>
-                <a:latin typeface="+mj-lt"/>
-                <a:ea typeface="+mj-ea"/>
-                <a:cs typeface="+mj-cs"/>
-              </a:defRPr>
-            </a:lvl1pPr>
-          </a:lstStyle>
+          <a:lstStyle/>
           <a:p>
             <a:pPr algn="ctr"/>
             <a:r>
@@ -8355,10 +8641,10 @@
       </p:sp>
       <p:pic>
         <p:nvPicPr>
-          <p:cNvPr id="4" name="Рисунок 3">
+          <p:cNvPr id="5" name="Рисунок 4">
             <a:extLst>
               <a:ext uri="{FF2B5EF4-FFF2-40B4-BE49-F238E27FC236}">
-                <a16:creationId xmlns:a16="http://schemas.microsoft.com/office/drawing/2014/main" id="{10FA64B7-6D3B-4A8C-A63B-C11BAEE7755D}"/>
+                <a16:creationId xmlns:a16="http://schemas.microsoft.com/office/drawing/2014/main" id="{1767A4A0-3DFB-42D5-8EF9-6BED6F16887C}"/>
               </a:ext>
             </a:extLst>
           </p:cNvPr>
@@ -8375,8 +8661,8 @@
         </p:blipFill>
         <p:spPr>
           <a:xfrm>
-            <a:off x="175116" y="1346453"/>
-            <a:ext cx="4468339" cy="2692267"/>
+            <a:off x="175399" y="1305469"/>
+            <a:ext cx="4030842" cy="3519080"/>
           </a:xfrm>
           <a:prstGeom prst="rect">
             <a:avLst/>
@@ -8385,10 +8671,10 @@
       </p:pic>
       <p:pic>
         <p:nvPicPr>
-          <p:cNvPr id="8" name="Рисунок 7">
+          <p:cNvPr id="7" name="Рисунок 6">
             <a:extLst>
               <a:ext uri="{FF2B5EF4-FFF2-40B4-BE49-F238E27FC236}">
-                <a16:creationId xmlns:a16="http://schemas.microsoft.com/office/drawing/2014/main" id="{146543F5-837B-4A20-A147-1AB254D12A6C}"/>
+                <a16:creationId xmlns:a16="http://schemas.microsoft.com/office/drawing/2014/main" id="{9D87A916-70DA-4BBF-A7A3-20554A732D07}"/>
               </a:ext>
             </a:extLst>
           </p:cNvPr>
@@ -8405,8 +8691,8 @@
         </p:blipFill>
         <p:spPr>
           <a:xfrm>
-            <a:off x="8684042" y="4145758"/>
-            <a:ext cx="3329885" cy="2652958"/>
+            <a:off x="9212522" y="1305469"/>
+            <a:ext cx="2811000" cy="4769728"/>
           </a:xfrm>
           <a:prstGeom prst="rect">
             <a:avLst/>
@@ -8415,10 +8701,10 @@
       </p:pic>
       <p:pic>
         <p:nvPicPr>
-          <p:cNvPr id="11" name="Рисунок 10">
+          <p:cNvPr id="9" name="Рисунок 8">
             <a:extLst>
               <a:ext uri="{FF2B5EF4-FFF2-40B4-BE49-F238E27FC236}">
-                <a16:creationId xmlns:a16="http://schemas.microsoft.com/office/drawing/2014/main" id="{E8A23D3A-3C4A-4E13-94A9-DB57F286392A}"/>
+                <a16:creationId xmlns:a16="http://schemas.microsoft.com/office/drawing/2014/main" id="{3D4AC6E8-37B8-4289-A90A-3A4D00E14F17}"/>
               </a:ext>
             </a:extLst>
           </p:cNvPr>
@@ -8435,68 +8721,8 @@
         </p:blipFill>
         <p:spPr>
           <a:xfrm>
-            <a:off x="5992775" y="1385762"/>
-            <a:ext cx="4405593" cy="2652959"/>
-          </a:xfrm>
-          <a:prstGeom prst="rect">
-            <a:avLst/>
-          </a:prstGeom>
-        </p:spPr>
-      </p:pic>
-      <p:pic>
-        <p:nvPicPr>
-          <p:cNvPr id="13" name="Рисунок 12">
-            <a:extLst>
-              <a:ext uri="{FF2B5EF4-FFF2-40B4-BE49-F238E27FC236}">
-                <a16:creationId xmlns:a16="http://schemas.microsoft.com/office/drawing/2014/main" id="{DF3024C6-E8D2-43F8-8380-447DD7115A07}"/>
-              </a:ext>
-            </a:extLst>
-          </p:cNvPr>
-          <p:cNvPicPr>
-            <a:picLocks noChangeAspect="1"/>
-          </p:cNvPicPr>
-          <p:nvPr/>
-        </p:nvPicPr>
-        <p:blipFill>
-          <a:blip r:embed="rId5"/>
-          <a:stretch>
-            <a:fillRect/>
-          </a:stretch>
-        </p:blipFill>
-        <p:spPr>
-          <a:xfrm>
-            <a:off x="5131924" y="4145758"/>
-            <a:ext cx="3063648" cy="2652958"/>
-          </a:xfrm>
-          <a:prstGeom prst="rect">
-            <a:avLst/>
-          </a:prstGeom>
-        </p:spPr>
-      </p:pic>
-      <p:pic>
-        <p:nvPicPr>
-          <p:cNvPr id="15" name="Рисунок 14">
-            <a:extLst>
-              <a:ext uri="{FF2B5EF4-FFF2-40B4-BE49-F238E27FC236}">
-                <a16:creationId xmlns:a16="http://schemas.microsoft.com/office/drawing/2014/main" id="{44BF6698-C8A4-4B55-99A0-678B8D01EA62}"/>
-              </a:ext>
-            </a:extLst>
-          </p:cNvPr>
-          <p:cNvPicPr>
-            <a:picLocks noChangeAspect="1"/>
-          </p:cNvPicPr>
-          <p:nvPr/>
-        </p:nvPicPr>
-        <p:blipFill>
-          <a:blip r:embed="rId6"/>
-          <a:stretch>
-            <a:fillRect/>
-          </a:stretch>
-        </p:blipFill>
-        <p:spPr>
-          <a:xfrm>
-            <a:off x="178073" y="4145758"/>
-            <a:ext cx="4465381" cy="2652960"/>
+            <a:off x="4447107" y="1305469"/>
+            <a:ext cx="4524549" cy="3770457"/>
           </a:xfrm>
           <a:prstGeom prst="rect">
             <a:avLst/>
@@ -8506,7 +8732,7 @@
     </p:spTree>
     <p:extLst>
       <p:ext uri="{BB962C8B-B14F-4D97-AF65-F5344CB8AC3E}">
-        <p14:creationId xmlns:p14="http://schemas.microsoft.com/office/powerpoint/2010/main" val="2580977942"/>
+        <p14:creationId xmlns:p14="http://schemas.microsoft.com/office/powerpoint/2010/main" val="3585857828"/>
       </p:ext>
     </p:extLst>
   </p:cSld>
